--- a/examples/Store화면 참조.pptx
+++ b/examples/Store화면 참조.pptx
@@ -7,6 +7,7 @@
   <p:sldIdLst>
     <p:sldId id="260" r:id="rId2"/>
     <p:sldId id="261" r:id="rId3"/>
+    <p:sldId id="262" r:id="rId4"/>
   </p:sldIdLst>
   <p:sldSz cx="12192000" cy="6858000"/>
   <p:notesSz cx="6858000" cy="9144000"/>
@@ -260,7 +261,7 @@
           <a:p>
             <a:fld id="{F8FA9E92-26D2-4973-9671-7F652E9E4432}" type="datetimeFigureOut">
               <a:rPr lang="ko-KR" altLang="en-US" smtClean="0"/>
-              <a:t>2026-06-21</a:t>
+              <a:t>2026-06-22</a:t>
             </a:fld>
             <a:endParaRPr lang="ko-KR" altLang="en-US"/>
           </a:p>
@@ -458,7 +459,7 @@
           <a:p>
             <a:fld id="{F8FA9E92-26D2-4973-9671-7F652E9E4432}" type="datetimeFigureOut">
               <a:rPr lang="ko-KR" altLang="en-US" smtClean="0"/>
-              <a:t>2026-06-21</a:t>
+              <a:t>2026-06-22</a:t>
             </a:fld>
             <a:endParaRPr lang="ko-KR" altLang="en-US"/>
           </a:p>
@@ -666,7 +667,7 @@
           <a:p>
             <a:fld id="{F8FA9E92-26D2-4973-9671-7F652E9E4432}" type="datetimeFigureOut">
               <a:rPr lang="ko-KR" altLang="en-US" smtClean="0"/>
-              <a:t>2026-06-21</a:t>
+              <a:t>2026-06-22</a:t>
             </a:fld>
             <a:endParaRPr lang="ko-KR" altLang="en-US"/>
           </a:p>
@@ -864,7 +865,7 @@
           <a:p>
             <a:fld id="{F8FA9E92-26D2-4973-9671-7F652E9E4432}" type="datetimeFigureOut">
               <a:rPr lang="ko-KR" altLang="en-US" smtClean="0"/>
-              <a:t>2026-06-21</a:t>
+              <a:t>2026-06-22</a:t>
             </a:fld>
             <a:endParaRPr lang="ko-KR" altLang="en-US"/>
           </a:p>
@@ -1139,7 +1140,7 @@
           <a:p>
             <a:fld id="{F8FA9E92-26D2-4973-9671-7F652E9E4432}" type="datetimeFigureOut">
               <a:rPr lang="ko-KR" altLang="en-US" smtClean="0"/>
-              <a:t>2026-06-21</a:t>
+              <a:t>2026-06-22</a:t>
             </a:fld>
             <a:endParaRPr lang="ko-KR" altLang="en-US"/>
           </a:p>
@@ -1404,7 +1405,7 @@
           <a:p>
             <a:fld id="{F8FA9E92-26D2-4973-9671-7F652E9E4432}" type="datetimeFigureOut">
               <a:rPr lang="ko-KR" altLang="en-US" smtClean="0"/>
-              <a:t>2026-06-21</a:t>
+              <a:t>2026-06-22</a:t>
             </a:fld>
             <a:endParaRPr lang="ko-KR" altLang="en-US"/>
           </a:p>
@@ -1816,7 +1817,7 @@
           <a:p>
             <a:fld id="{F8FA9E92-26D2-4973-9671-7F652E9E4432}" type="datetimeFigureOut">
               <a:rPr lang="ko-KR" altLang="en-US" smtClean="0"/>
-              <a:t>2026-06-21</a:t>
+              <a:t>2026-06-22</a:t>
             </a:fld>
             <a:endParaRPr lang="ko-KR" altLang="en-US"/>
           </a:p>
@@ -1957,7 +1958,7 @@
           <a:p>
             <a:fld id="{F8FA9E92-26D2-4973-9671-7F652E9E4432}" type="datetimeFigureOut">
               <a:rPr lang="ko-KR" altLang="en-US" smtClean="0"/>
-              <a:t>2026-06-21</a:t>
+              <a:t>2026-06-22</a:t>
             </a:fld>
             <a:endParaRPr lang="ko-KR" altLang="en-US"/>
           </a:p>
@@ -2070,7 +2071,7 @@
           <a:p>
             <a:fld id="{F8FA9E92-26D2-4973-9671-7F652E9E4432}" type="datetimeFigureOut">
               <a:rPr lang="ko-KR" altLang="en-US" smtClean="0"/>
-              <a:t>2026-06-21</a:t>
+              <a:t>2026-06-22</a:t>
             </a:fld>
             <a:endParaRPr lang="ko-KR" altLang="en-US"/>
           </a:p>
@@ -2381,7 +2382,7 @@
           <a:p>
             <a:fld id="{F8FA9E92-26D2-4973-9671-7F652E9E4432}" type="datetimeFigureOut">
               <a:rPr lang="ko-KR" altLang="en-US" smtClean="0"/>
-              <a:t>2026-06-21</a:t>
+              <a:t>2026-06-22</a:t>
             </a:fld>
             <a:endParaRPr lang="ko-KR" altLang="en-US"/>
           </a:p>
@@ -2669,7 +2670,7 @@
           <a:p>
             <a:fld id="{F8FA9E92-26D2-4973-9671-7F652E9E4432}" type="datetimeFigureOut">
               <a:rPr lang="ko-KR" altLang="en-US" smtClean="0"/>
-              <a:t>2026-06-21</a:t>
+              <a:t>2026-06-22</a:t>
             </a:fld>
             <a:endParaRPr lang="ko-KR" altLang="en-US"/>
           </a:p>
@@ -2910,7 +2911,7 @@
           <a:p>
             <a:fld id="{F8FA9E92-26D2-4973-9671-7F652E9E4432}" type="datetimeFigureOut">
               <a:rPr lang="ko-KR" altLang="en-US" smtClean="0"/>
-              <a:t>2026-06-21</a:t>
+              <a:t>2026-06-22</a:t>
             </a:fld>
             <a:endParaRPr lang="ko-KR" altLang="en-US"/>
           </a:p>
@@ -9015,6 +9016,457 @@
 </p:sld>
 </file>
 
+<file path=ppt/slides/slide3.xml><?xml version="1.0" encoding="utf-8"?>
+<p:sld xmlns:a="http://schemas.openxmlformats.org/drawingml/2006/main" xmlns:r="http://schemas.openxmlformats.org/officeDocument/2006/relationships" xmlns:p="http://schemas.openxmlformats.org/presentationml/2006/main">
+  <p:cSld>
+    <p:spTree>
+      <p:nvGrpSpPr>
+        <p:cNvPr id="1" name=""/>
+        <p:cNvGrpSpPr/>
+        <p:nvPr/>
+      </p:nvGrpSpPr>
+      <p:grpSpPr>
+        <a:xfrm>
+          <a:off x="0" y="0"/>
+          <a:ext cx="0" cy="0"/>
+          <a:chOff x="0" y="0"/>
+          <a:chExt cx="0" cy="0"/>
+        </a:xfrm>
+      </p:grpSpPr>
+      <p:pic>
+        <p:nvPicPr>
+          <p:cNvPr id="4" name="그림 3">
+            <a:extLst>
+              <a:ext uri="{FF2B5EF4-FFF2-40B4-BE49-F238E27FC236}">
+                <a16:creationId xmlns:a16="http://schemas.microsoft.com/office/drawing/2014/main" id="{9291CCB9-07CD-0E2F-C855-6CACE6B487F0}"/>
+              </a:ext>
+            </a:extLst>
+          </p:cNvPr>
+          <p:cNvPicPr>
+            <a:picLocks noChangeAspect="1"/>
+          </p:cNvPicPr>
+          <p:nvPr/>
+        </p:nvPicPr>
+        <p:blipFill>
+          <a:blip r:embed="rId2"/>
+          <a:stretch>
+            <a:fillRect/>
+          </a:stretch>
+        </p:blipFill>
+        <p:spPr>
+          <a:xfrm>
+            <a:off x="448769" y="690466"/>
+            <a:ext cx="4475466" cy="4990922"/>
+          </a:xfrm>
+          <a:prstGeom prst="rect">
+            <a:avLst/>
+          </a:prstGeom>
+        </p:spPr>
+      </p:pic>
+      <p:sp>
+        <p:nvSpPr>
+          <p:cNvPr id="5" name="사각형: 모서리가 접힌 도형 4">
+            <a:extLst>
+              <a:ext uri="{FF2B5EF4-FFF2-40B4-BE49-F238E27FC236}">
+                <a16:creationId xmlns:a16="http://schemas.microsoft.com/office/drawing/2014/main" id="{61E4A548-C5AD-CA5E-11BB-D8B28EA353E1}"/>
+              </a:ext>
+            </a:extLst>
+          </p:cNvPr>
+          <p:cNvSpPr/>
+          <p:nvPr/>
+        </p:nvSpPr>
+        <p:spPr>
+          <a:xfrm>
+            <a:off x="5119539" y="1670181"/>
+            <a:ext cx="3278012" cy="2669456"/>
+          </a:xfrm>
+          <a:prstGeom prst="foldedCorner">
+            <a:avLst>
+              <a:gd name="adj" fmla="val 7579"/>
+            </a:avLst>
+          </a:prstGeom>
+          <a:solidFill>
+            <a:schemeClr val="bg1">
+              <a:lumMod val="95000"/>
+            </a:schemeClr>
+          </a:solidFill>
+          <a:ln w="3175">
+            <a:solidFill>
+              <a:schemeClr val="tx1">
+                <a:lumMod val="50000"/>
+                <a:lumOff val="50000"/>
+              </a:schemeClr>
+            </a:solidFill>
+          </a:ln>
+        </p:spPr>
+        <p:style>
+          <a:lnRef idx="2">
+            <a:schemeClr val="accent1">
+              <a:shade val="15000"/>
+            </a:schemeClr>
+          </a:lnRef>
+          <a:fillRef idx="1">
+            <a:schemeClr val="accent1"/>
+          </a:fillRef>
+          <a:effectRef idx="0">
+            <a:schemeClr val="accent1"/>
+          </a:effectRef>
+          <a:fontRef idx="minor">
+            <a:schemeClr val="lt1"/>
+          </a:fontRef>
+        </p:style>
+        <p:txBody>
+          <a:bodyPr rtlCol="0" anchor="ctr"/>
+          <a:lstStyle/>
+          <a:p>
+            <a:pPr marL="171450" indent="-171450">
+              <a:buFontTx/>
+              <a:buChar char="-"/>
+            </a:pPr>
+            <a:r>
+              <a:rPr lang="ko-KR" altLang="en-US" sz="1200">
+                <a:solidFill>
+                  <a:schemeClr val="tx1">
+                    <a:lumMod val="75000"/>
+                    <a:lumOff val="25000"/>
+                  </a:schemeClr>
+                </a:solidFill>
+              </a:rPr>
+              <a:t>수정사항</a:t>
+            </a:r>
+            <a:endParaRPr lang="en-US" altLang="ko-KR" sz="1200">
+              <a:solidFill>
+                <a:schemeClr val="tx1">
+                  <a:lumMod val="75000"/>
+                  <a:lumOff val="25000"/>
+                </a:schemeClr>
+              </a:solidFill>
+            </a:endParaRPr>
+          </a:p>
+          <a:p>
+            <a:r>
+              <a:rPr lang="en-US" altLang="ko-KR" sz="1200">
+                <a:solidFill>
+                  <a:schemeClr val="tx1">
+                    <a:lumMod val="75000"/>
+                    <a:lumOff val="25000"/>
+                  </a:schemeClr>
+                </a:solidFill>
+              </a:rPr>
+              <a:t>Store </a:t>
+            </a:r>
+            <a:r>
+              <a:rPr lang="ko-KR" altLang="en-US" sz="1200">
+                <a:solidFill>
+                  <a:schemeClr val="tx1">
+                    <a:lumMod val="75000"/>
+                    <a:lumOff val="25000"/>
+                  </a:schemeClr>
+                </a:solidFill>
+              </a:rPr>
+              <a:t>명칭 </a:t>
+            </a:r>
+            <a:r>
+              <a:rPr lang="en-US" altLang="ko-KR" sz="1200">
+                <a:solidFill>
+                  <a:schemeClr val="tx1">
+                    <a:lumMod val="75000"/>
+                    <a:lumOff val="25000"/>
+                  </a:schemeClr>
+                </a:solidFill>
+              </a:rPr>
+              <a:t>-&gt; Store Name</a:t>
+            </a:r>
+          </a:p>
+          <a:p>
+            <a:r>
+              <a:rPr lang="en-US" altLang="ko-KR" sz="1200">
+                <a:solidFill>
+                  <a:schemeClr val="tx1">
+                    <a:lumMod val="75000"/>
+                    <a:lumOff val="25000"/>
+                  </a:schemeClr>
+                </a:solidFill>
+              </a:rPr>
+              <a:t>Store ID -&gt; Store ID (defineStore)</a:t>
+            </a:r>
+          </a:p>
+          <a:p>
+            <a:endParaRPr lang="en-US" altLang="ko-KR" sz="1200">
+              <a:solidFill>
+                <a:schemeClr val="tx1">
+                  <a:lumMod val="75000"/>
+                  <a:lumOff val="25000"/>
+                </a:schemeClr>
+              </a:solidFill>
+            </a:endParaRPr>
+          </a:p>
+          <a:p>
+            <a:r>
+              <a:rPr lang="ko-KR" altLang="en-US" sz="1200">
+                <a:solidFill>
+                  <a:schemeClr val="tx1">
+                    <a:lumMod val="75000"/>
+                    <a:lumOff val="25000"/>
+                  </a:schemeClr>
+                </a:solidFill>
+              </a:rPr>
+              <a:t>새로운 필드 추가</a:t>
+            </a:r>
+            <a:endParaRPr lang="en-US" altLang="ko-KR" sz="1200">
+              <a:solidFill>
+                <a:schemeClr val="tx1">
+                  <a:lumMod val="75000"/>
+                  <a:lumOff val="25000"/>
+                </a:schemeClr>
+              </a:solidFill>
+            </a:endParaRPr>
+          </a:p>
+          <a:p>
+            <a:r>
+              <a:rPr lang="en-US" altLang="ko-KR" sz="1200">
+                <a:solidFill>
+                  <a:schemeClr val="tx1">
+                    <a:lumMod val="75000"/>
+                    <a:lumOff val="25000"/>
+                  </a:schemeClr>
+                </a:solidFill>
+              </a:rPr>
+              <a:t>Import</a:t>
+            </a:r>
+            <a:r>
+              <a:rPr lang="ko-KR" altLang="en-US" sz="1200">
+                <a:solidFill>
+                  <a:schemeClr val="tx1">
+                    <a:lumMod val="75000"/>
+                    <a:lumOff val="25000"/>
+                  </a:schemeClr>
+                </a:solidFill>
+              </a:rPr>
+              <a:t>명 </a:t>
+            </a:r>
+            <a:r>
+              <a:rPr lang="en-US" altLang="ko-KR" sz="1200">
+                <a:solidFill>
+                  <a:schemeClr val="tx1">
+                    <a:lumMod val="75000"/>
+                    <a:lumOff val="25000"/>
+                  </a:schemeClr>
+                </a:solidFill>
+              </a:rPr>
+              <a:t>: vue</a:t>
+            </a:r>
+            <a:r>
+              <a:rPr lang="ko-KR" altLang="en-US" sz="1200">
+                <a:solidFill>
+                  <a:schemeClr val="tx1">
+                    <a:lumMod val="75000"/>
+                    <a:lumOff val="25000"/>
+                  </a:schemeClr>
+                </a:solidFill>
+              </a:rPr>
+              <a:t>에서 </a:t>
+            </a:r>
+            <a:r>
+              <a:rPr lang="en-US" altLang="ko-KR" sz="1200">
+                <a:solidFill>
+                  <a:schemeClr val="tx1">
+                    <a:lumMod val="75000"/>
+                    <a:lumOff val="25000"/>
+                  </a:schemeClr>
+                </a:solidFill>
+              </a:rPr>
+              <a:t>import </a:t>
+            </a:r>
+            <a:r>
+              <a:rPr lang="ko-KR" altLang="en-US" sz="1200">
+                <a:solidFill>
+                  <a:schemeClr val="tx1">
+                    <a:lumMod val="75000"/>
+                    <a:lumOff val="25000"/>
+                  </a:schemeClr>
+                </a:solidFill>
+              </a:rPr>
+              <a:t>변수명</a:t>
+            </a:r>
+            <a:endParaRPr lang="en-US" altLang="ko-KR" sz="1200">
+              <a:solidFill>
+                <a:schemeClr val="tx1">
+                  <a:lumMod val="75000"/>
+                  <a:lumOff val="25000"/>
+                </a:schemeClr>
+              </a:solidFill>
+            </a:endParaRPr>
+          </a:p>
+          <a:p>
+            <a:endParaRPr lang="en-US" altLang="ko-KR" sz="1200">
+              <a:solidFill>
+                <a:schemeClr val="tx1">
+                  <a:lumMod val="75000"/>
+                  <a:lumOff val="25000"/>
+                </a:schemeClr>
+              </a:solidFill>
+            </a:endParaRPr>
+          </a:p>
+          <a:p>
+            <a:r>
+              <a:rPr lang="en-US" altLang="ko-KR" sz="1200">
+                <a:solidFill>
+                  <a:schemeClr val="tx1">
+                    <a:lumMod val="75000"/>
+                    <a:lumOff val="25000"/>
+                  </a:schemeClr>
+                </a:solidFill>
+              </a:rPr>
+              <a:t>vue </a:t>
+            </a:r>
+            <a:r>
+              <a:rPr lang="ko-KR" altLang="en-US" sz="1200">
+                <a:solidFill>
+                  <a:schemeClr val="tx1">
+                    <a:lumMod val="75000"/>
+                    <a:lumOff val="25000"/>
+                  </a:schemeClr>
+                </a:solidFill>
+              </a:rPr>
+              <a:t>에서 참조하는 변수 </a:t>
+            </a:r>
+            <a:endParaRPr lang="en-US" altLang="ko-KR" sz="1200">
+              <a:solidFill>
+                <a:schemeClr val="tx1">
+                  <a:lumMod val="75000"/>
+                  <a:lumOff val="25000"/>
+                </a:schemeClr>
+              </a:solidFill>
+            </a:endParaRPr>
+          </a:p>
+          <a:p>
+            <a:r>
+              <a:rPr lang="en-US" altLang="ko-KR" sz="1200" b="0">
+                <a:solidFill>
+                  <a:srgbClr val="FF7B72"/>
+                </a:solidFill>
+                <a:effectLst/>
+                <a:latin typeface="Consolas" panose="020B0609020204030204" pitchFamily="49" charset="0"/>
+              </a:rPr>
+              <a:t>const</a:t>
+            </a:r>
+            <a:r>
+              <a:rPr lang="en-US" altLang="ko-KR" sz="1200" b="0">
+                <a:solidFill>
+                  <a:srgbClr val="BBBEBF"/>
+                </a:solidFill>
+                <a:effectLst/>
+                <a:latin typeface="Consolas" panose="020B0609020204030204" pitchFamily="49" charset="0"/>
+              </a:rPr>
+              <a:t> </a:t>
+            </a:r>
+            <a:r>
+              <a:rPr lang="en-US" altLang="ko-KR" sz="1200" b="0">
+                <a:solidFill>
+                  <a:srgbClr val="79C0FF"/>
+                </a:solidFill>
+                <a:effectLst/>
+                <a:latin typeface="Consolas" panose="020B0609020204030204" pitchFamily="49" charset="0"/>
+              </a:rPr>
+              <a:t>storeName</a:t>
+            </a:r>
+            <a:r>
+              <a:rPr lang="en-US" altLang="ko-KR" sz="1200" b="0">
+                <a:solidFill>
+                  <a:srgbClr val="BBBEBF"/>
+                </a:solidFill>
+                <a:effectLst/>
+                <a:latin typeface="Consolas" panose="020B0609020204030204" pitchFamily="49" charset="0"/>
+              </a:rPr>
+              <a:t> </a:t>
+            </a:r>
+            <a:r>
+              <a:rPr lang="en-US" altLang="ko-KR" sz="1200" b="0">
+                <a:solidFill>
+                  <a:srgbClr val="D4D4D4"/>
+                </a:solidFill>
+                <a:effectLst/>
+                <a:latin typeface="Consolas" panose="020B0609020204030204" pitchFamily="49" charset="0"/>
+              </a:rPr>
+              <a:t>=</a:t>
+            </a:r>
+            <a:r>
+              <a:rPr lang="en-US" altLang="ko-KR" sz="1200" b="0">
+                <a:solidFill>
+                  <a:srgbClr val="BBBEBF"/>
+                </a:solidFill>
+                <a:effectLst/>
+                <a:latin typeface="Consolas" panose="020B0609020204030204" pitchFamily="49" charset="0"/>
+              </a:rPr>
+              <a:t> </a:t>
+            </a:r>
+            <a:r>
+              <a:rPr lang="en-US" altLang="ko-KR" sz="1200" b="0">
+                <a:solidFill>
+                  <a:srgbClr val="D2A8FF"/>
+                </a:solidFill>
+                <a:effectLst/>
+                <a:latin typeface="Consolas" panose="020B0609020204030204" pitchFamily="49" charset="0"/>
+              </a:rPr>
+              <a:t>ref</a:t>
+            </a:r>
+            <a:r>
+              <a:rPr lang="en-US" altLang="ko-KR" sz="1200" b="0">
+                <a:solidFill>
+                  <a:srgbClr val="BBBEBF"/>
+                </a:solidFill>
+                <a:effectLst/>
+                <a:latin typeface="Consolas" panose="020B0609020204030204" pitchFamily="49" charset="0"/>
+              </a:rPr>
+              <a:t>(</a:t>
+            </a:r>
+            <a:r>
+              <a:rPr lang="en-US" altLang="ko-KR" sz="1200" b="0">
+                <a:solidFill>
+                  <a:srgbClr val="A5D6FF"/>
+                </a:solidFill>
+                <a:effectLst/>
+                <a:latin typeface="Consolas" panose="020B0609020204030204" pitchFamily="49" charset="0"/>
+              </a:rPr>
+              <a:t>'useIndexUtilStore'</a:t>
+            </a:r>
+            <a:r>
+              <a:rPr lang="en-US" altLang="ko-KR" sz="1200" b="0">
+                <a:solidFill>
+                  <a:srgbClr val="BBBEBF"/>
+                </a:solidFill>
+                <a:effectLst/>
+                <a:latin typeface="Consolas" panose="020B0609020204030204" pitchFamily="49" charset="0"/>
+              </a:rPr>
+              <a:t>)</a:t>
+            </a:r>
+          </a:p>
+          <a:p>
+            <a:endParaRPr lang="ko-KR" altLang="en-US" sz="1200">
+              <a:solidFill>
+                <a:schemeClr val="tx1">
+                  <a:lumMod val="75000"/>
+                  <a:lumOff val="25000"/>
+                </a:schemeClr>
+              </a:solidFill>
+            </a:endParaRPr>
+          </a:p>
+        </p:txBody>
+      </p:sp>
+    </p:spTree>
+    <p:extLst>
+      <p:ext uri="{BB962C8B-B14F-4D97-AF65-F5344CB8AC3E}">
+        <p14:creationId xmlns:p14="http://schemas.microsoft.com/office/powerpoint/2010/main" val="1589902129"/>
+      </p:ext>
+    </p:extLst>
+  </p:cSld>
+  <p:clrMapOvr>
+    <a:masterClrMapping/>
+  </p:clrMapOvr>
+</p:sld>
+</file>
+
 <file path=ppt/theme/theme1.xml><?xml version="1.0" encoding="utf-8"?>
 <a:theme xmlns:a="http://schemas.openxmlformats.org/drawingml/2006/main" name="Office 테마">
   <a:themeElements>

--- a/examples/Store화면 참조.pptx
+++ b/examples/Store화면 참조.pptx
@@ -8,6 +8,11 @@
     <p:sldId id="260" r:id="rId2"/>
     <p:sldId id="261" r:id="rId3"/>
     <p:sldId id="262" r:id="rId4"/>
+    <p:sldId id="263" r:id="rId5"/>
+    <p:sldId id="264" r:id="rId6"/>
+    <p:sldId id="265" r:id="rId7"/>
+    <p:sldId id="266" r:id="rId8"/>
+    <p:sldId id="267" r:id="rId9"/>
   </p:sldIdLst>
   <p:sldSz cx="12192000" cy="6858000"/>
   <p:notesSz cx="6858000" cy="9144000"/>
@@ -9467,6 +9472,2541 @@
 </p:sld>
 </file>
 
+<file path=ppt/slides/slide4.xml><?xml version="1.0" encoding="utf-8"?>
+<p:sld xmlns:a="http://schemas.openxmlformats.org/drawingml/2006/main" xmlns:r="http://schemas.openxmlformats.org/officeDocument/2006/relationships" xmlns:p="http://schemas.openxmlformats.org/presentationml/2006/main">
+  <p:cSld>
+    <p:spTree>
+      <p:nvGrpSpPr>
+        <p:cNvPr id="1" name=""/>
+        <p:cNvGrpSpPr/>
+        <p:nvPr/>
+      </p:nvGrpSpPr>
+      <p:grpSpPr>
+        <a:xfrm>
+          <a:off x="0" y="0"/>
+          <a:ext cx="0" cy="0"/>
+          <a:chOff x="0" y="0"/>
+          <a:chExt cx="0" cy="0"/>
+        </a:xfrm>
+      </p:grpSpPr>
+      <p:pic>
+        <p:nvPicPr>
+          <p:cNvPr id="3" name="그림 2">
+            <a:extLst>
+              <a:ext uri="{FF2B5EF4-FFF2-40B4-BE49-F238E27FC236}">
+                <a16:creationId xmlns:a16="http://schemas.microsoft.com/office/drawing/2014/main" id="{45223810-956E-283D-CDE5-49CA250CF74C}"/>
+              </a:ext>
+            </a:extLst>
+          </p:cNvPr>
+          <p:cNvPicPr>
+            <a:picLocks noChangeAspect="1"/>
+          </p:cNvPicPr>
+          <p:nvPr/>
+        </p:nvPicPr>
+        <p:blipFill>
+          <a:blip r:embed="rId2"/>
+          <a:stretch>
+            <a:fillRect/>
+          </a:stretch>
+        </p:blipFill>
+        <p:spPr>
+          <a:xfrm>
+            <a:off x="370608" y="363867"/>
+            <a:ext cx="4382117" cy="1446272"/>
+          </a:xfrm>
+          <a:prstGeom prst="rect">
+            <a:avLst/>
+          </a:prstGeom>
+        </p:spPr>
+      </p:pic>
+      <p:sp>
+        <p:nvSpPr>
+          <p:cNvPr id="6" name="사각형: 모서리가 접힌 도형 5">
+            <a:extLst>
+              <a:ext uri="{FF2B5EF4-FFF2-40B4-BE49-F238E27FC236}">
+                <a16:creationId xmlns:a16="http://schemas.microsoft.com/office/drawing/2014/main" id="{96AE07C6-53E9-2176-F601-3FADAF931BDE}"/>
+              </a:ext>
+            </a:extLst>
+          </p:cNvPr>
+          <p:cNvSpPr/>
+          <p:nvPr/>
+        </p:nvSpPr>
+        <p:spPr>
+          <a:xfrm>
+            <a:off x="4942257" y="475862"/>
+            <a:ext cx="4304380" cy="3303036"/>
+          </a:xfrm>
+          <a:prstGeom prst="foldedCorner">
+            <a:avLst>
+              <a:gd name="adj" fmla="val 7579"/>
+            </a:avLst>
+          </a:prstGeom>
+          <a:solidFill>
+            <a:schemeClr val="bg1">
+              <a:lumMod val="95000"/>
+            </a:schemeClr>
+          </a:solidFill>
+          <a:ln w="3175">
+            <a:solidFill>
+              <a:schemeClr val="tx1">
+                <a:lumMod val="50000"/>
+                <a:lumOff val="50000"/>
+              </a:schemeClr>
+            </a:solidFill>
+          </a:ln>
+        </p:spPr>
+        <p:style>
+          <a:lnRef idx="2">
+            <a:schemeClr val="accent1">
+              <a:shade val="15000"/>
+            </a:schemeClr>
+          </a:lnRef>
+          <a:fillRef idx="1">
+            <a:schemeClr val="accent1"/>
+          </a:fillRef>
+          <a:effectRef idx="0">
+            <a:schemeClr val="accent1"/>
+          </a:effectRef>
+          <a:fontRef idx="minor">
+            <a:schemeClr val="lt1"/>
+          </a:fontRef>
+        </p:style>
+        <p:txBody>
+          <a:bodyPr rtlCol="0" anchor="ctr"/>
+          <a:lstStyle/>
+          <a:p>
+            <a:pPr marL="171450" indent="-171450">
+              <a:buFontTx/>
+              <a:buChar char="-"/>
+            </a:pPr>
+            <a:r>
+              <a:rPr lang="ko-KR" altLang="en-US" sz="1200">
+                <a:solidFill>
+                  <a:schemeClr val="tx1">
+                    <a:lumMod val="75000"/>
+                    <a:lumOff val="25000"/>
+                  </a:schemeClr>
+                </a:solidFill>
+              </a:rPr>
+              <a:t>수정사항</a:t>
+            </a:r>
+            <a:endParaRPr lang="en-US" altLang="ko-KR" sz="1200">
+              <a:solidFill>
+                <a:schemeClr val="tx1">
+                  <a:lumMod val="75000"/>
+                  <a:lumOff val="25000"/>
+                </a:schemeClr>
+              </a:solidFill>
+            </a:endParaRPr>
+          </a:p>
+          <a:p>
+            <a:r>
+              <a:rPr lang="en-US" altLang="ko-KR" sz="1200">
+                <a:solidFill>
+                  <a:schemeClr val="tx1">
+                    <a:lumMod val="75000"/>
+                    <a:lumOff val="25000"/>
+                  </a:schemeClr>
+                </a:solidFill>
+              </a:rPr>
+              <a:t>State </a:t>
+            </a:r>
+            <a:r>
+              <a:rPr lang="ko-KR" altLang="en-US" sz="1200">
+                <a:solidFill>
+                  <a:schemeClr val="tx1">
+                    <a:lumMod val="75000"/>
+                    <a:lumOff val="25000"/>
+                  </a:schemeClr>
+                </a:solidFill>
+              </a:rPr>
+              <a:t>창의 변수필드는 </a:t>
+            </a:r>
+            <a:r>
+              <a:rPr lang="en-US" altLang="ko-KR" sz="1200">
+                <a:solidFill>
+                  <a:schemeClr val="tx1">
+                    <a:lumMod val="75000"/>
+                    <a:lumOff val="25000"/>
+                  </a:schemeClr>
+                </a:solidFill>
+              </a:rPr>
+              <a:t>TREE</a:t>
+            </a:r>
+            <a:r>
+              <a:rPr lang="ko-KR" altLang="en-US" sz="1200">
+                <a:solidFill>
+                  <a:schemeClr val="tx1">
+                    <a:lumMod val="75000"/>
+                    <a:lumOff val="25000"/>
+                  </a:schemeClr>
+                </a:solidFill>
+              </a:rPr>
+              <a:t>모양으로 적용해줘</a:t>
+            </a:r>
+            <a:endParaRPr lang="en-US" altLang="ko-KR" sz="1200">
+              <a:solidFill>
+                <a:schemeClr val="tx1">
+                  <a:lumMod val="75000"/>
+                  <a:lumOff val="25000"/>
+                </a:schemeClr>
+              </a:solidFill>
+            </a:endParaRPr>
+          </a:p>
+          <a:p>
+            <a:endParaRPr lang="en-US" altLang="ko-KR" sz="1200">
+              <a:solidFill>
+                <a:schemeClr val="tx1">
+                  <a:lumMod val="75000"/>
+                  <a:lumOff val="25000"/>
+                </a:schemeClr>
+              </a:solidFill>
+            </a:endParaRPr>
+          </a:p>
+          <a:p>
+            <a:endParaRPr lang="en-US" altLang="ko-KR" sz="1200">
+              <a:solidFill>
+                <a:schemeClr val="tx1">
+                  <a:lumMod val="75000"/>
+                  <a:lumOff val="25000"/>
+                </a:schemeClr>
+              </a:solidFill>
+            </a:endParaRPr>
+          </a:p>
+          <a:p>
+            <a:endParaRPr lang="en-US" altLang="ko-KR" sz="1200">
+              <a:solidFill>
+                <a:schemeClr val="tx1"/>
+              </a:solidFill>
+            </a:endParaRPr>
+          </a:p>
+          <a:p>
+            <a:r>
+              <a:rPr lang="en-US" altLang="ko-KR" sz="1200" b="0">
+                <a:solidFill>
+                  <a:schemeClr val="tx1"/>
+                </a:solidFill>
+                <a:effectLst/>
+                <a:latin typeface="Consolas" panose="020B0609020204030204" pitchFamily="49" charset="0"/>
+              </a:rPr>
+              <a:t>  state: () =&gt; ({</a:t>
+            </a:r>
+          </a:p>
+          <a:p>
+            <a:r>
+              <a:rPr lang="en-US" altLang="ko-KR" sz="1200" b="0">
+                <a:solidFill>
+                  <a:schemeClr val="tx1"/>
+                </a:solidFill>
+                <a:effectLst/>
+                <a:latin typeface="Consolas" panose="020B0609020204030204" pitchFamily="49" charset="0"/>
+              </a:rPr>
+              <a:t>    rows: [],</a:t>
+            </a:r>
+          </a:p>
+          <a:p>
+            <a:r>
+              <a:rPr lang="en-US" altLang="ko-KR" sz="1200" b="0">
+                <a:solidFill>
+                  <a:schemeClr val="tx1"/>
+                </a:solidFill>
+                <a:effectLst/>
+                <a:latin typeface="Consolas" panose="020B0609020204030204" pitchFamily="49" charset="0"/>
+              </a:rPr>
+              <a:t>    selectedRow: null,</a:t>
+            </a:r>
+          </a:p>
+          <a:p>
+            <a:r>
+              <a:rPr lang="en-US" altLang="ko-KR" sz="1200" b="0">
+                <a:solidFill>
+                  <a:schemeClr val="tx1"/>
+                </a:solidFill>
+                <a:effectLst/>
+                <a:latin typeface="Consolas" panose="020B0609020204030204" pitchFamily="49" charset="0"/>
+              </a:rPr>
+              <a:t>    loading: false,</a:t>
+            </a:r>
+          </a:p>
+          <a:p>
+            <a:r>
+              <a:rPr lang="en-US" altLang="ko-KR" sz="1200" b="0">
+                <a:solidFill>
+                  <a:schemeClr val="tx1"/>
+                </a:solidFill>
+                <a:effectLst/>
+                <a:latin typeface="Consolas" panose="020B0609020204030204" pitchFamily="49" charset="0"/>
+              </a:rPr>
+              <a:t>    entity:{</a:t>
+            </a:r>
+          </a:p>
+          <a:p>
+            <a:r>
+              <a:rPr lang="en-US" altLang="ko-KR" sz="1200">
+                <a:solidFill>
+                  <a:schemeClr val="tx1"/>
+                </a:solidFill>
+                <a:latin typeface="Consolas" panose="020B0609020204030204" pitchFamily="49" charset="0"/>
+              </a:rPr>
+              <a:t>	   id: null,</a:t>
+            </a:r>
+          </a:p>
+          <a:p>
+            <a:r>
+              <a:rPr lang="en-US" altLang="ko-KR" sz="1200">
+                <a:solidFill>
+                  <a:schemeClr val="tx1"/>
+                </a:solidFill>
+                <a:latin typeface="Consolas" panose="020B0609020204030204" pitchFamily="49" charset="0"/>
+              </a:rPr>
+              <a:t>  	   name:null</a:t>
+            </a:r>
+          </a:p>
+          <a:p>
+            <a:r>
+              <a:rPr lang="en-US" altLang="ko-KR" sz="1200" b="0">
+                <a:solidFill>
+                  <a:schemeClr val="tx1"/>
+                </a:solidFill>
+                <a:effectLst/>
+                <a:latin typeface="Consolas" panose="020B0609020204030204" pitchFamily="49" charset="0"/>
+              </a:rPr>
+              <a:t>	} </a:t>
+            </a:r>
+          </a:p>
+          <a:p>
+            <a:r>
+              <a:rPr lang="en-US" altLang="ko-KR" sz="1200" b="0">
+                <a:solidFill>
+                  <a:schemeClr val="tx1"/>
+                </a:solidFill>
+                <a:effectLst/>
+                <a:latin typeface="Consolas" panose="020B0609020204030204" pitchFamily="49" charset="0"/>
+              </a:rPr>
+              <a:t>  }),</a:t>
+            </a:r>
+          </a:p>
+          <a:p>
+            <a:endParaRPr lang="en-US" altLang="ko-KR" sz="1200">
+              <a:solidFill>
+                <a:schemeClr val="tx1">
+                  <a:lumMod val="75000"/>
+                  <a:lumOff val="25000"/>
+                </a:schemeClr>
+              </a:solidFill>
+            </a:endParaRPr>
+          </a:p>
+          <a:p>
+            <a:endParaRPr lang="ko-KR" altLang="en-US" sz="1200">
+              <a:solidFill>
+                <a:schemeClr val="tx1">
+                  <a:lumMod val="75000"/>
+                  <a:lumOff val="25000"/>
+                </a:schemeClr>
+              </a:solidFill>
+            </a:endParaRPr>
+          </a:p>
+        </p:txBody>
+      </p:sp>
+      <p:sp>
+        <p:nvSpPr>
+          <p:cNvPr id="7" name="사각형: 둥근 모서리 6">
+            <a:extLst>
+              <a:ext uri="{FF2B5EF4-FFF2-40B4-BE49-F238E27FC236}">
+                <a16:creationId xmlns:a16="http://schemas.microsoft.com/office/drawing/2014/main" id="{1501A3D9-7150-C901-0185-1D0EB2BAA370}"/>
+              </a:ext>
+            </a:extLst>
+          </p:cNvPr>
+          <p:cNvSpPr/>
+          <p:nvPr/>
+        </p:nvSpPr>
+        <p:spPr>
+          <a:xfrm>
+            <a:off x="280829" y="3569431"/>
+            <a:ext cx="3563384" cy="1943391"/>
+          </a:xfrm>
+          <a:prstGeom prst="roundRect">
+            <a:avLst>
+              <a:gd name="adj" fmla="val 3460"/>
+            </a:avLst>
+          </a:prstGeom>
+          <a:solidFill>
+            <a:schemeClr val="bg1">
+              <a:lumMod val="95000"/>
+            </a:schemeClr>
+          </a:solidFill>
+          <a:ln w="3175">
+            <a:solidFill>
+              <a:schemeClr val="bg1">
+                <a:lumMod val="65000"/>
+              </a:schemeClr>
+            </a:solidFill>
+          </a:ln>
+        </p:spPr>
+        <p:style>
+          <a:lnRef idx="2">
+            <a:schemeClr val="accent1">
+              <a:shade val="15000"/>
+            </a:schemeClr>
+          </a:lnRef>
+          <a:fillRef idx="1">
+            <a:schemeClr val="accent1"/>
+          </a:fillRef>
+          <a:effectRef idx="0">
+            <a:schemeClr val="accent1"/>
+          </a:effectRef>
+          <a:fontRef idx="minor">
+            <a:schemeClr val="lt1"/>
+          </a:fontRef>
+        </p:style>
+        <p:txBody>
+          <a:bodyPr rtlCol="0" anchor="ctr"/>
+          <a:lstStyle/>
+          <a:p>
+            <a:pPr algn="ctr"/>
+            <a:endParaRPr lang="ko-KR" altLang="en-US"/>
+          </a:p>
+        </p:txBody>
+      </p:sp>
+      <p:sp>
+        <p:nvSpPr>
+          <p:cNvPr id="8" name="TextBox 7">
+            <a:extLst>
+              <a:ext uri="{FF2B5EF4-FFF2-40B4-BE49-F238E27FC236}">
+                <a16:creationId xmlns:a16="http://schemas.microsoft.com/office/drawing/2014/main" id="{9E4B3DF4-F371-7CCD-F206-2790D399C245}"/>
+              </a:ext>
+            </a:extLst>
+          </p:cNvPr>
+          <p:cNvSpPr txBox="1"/>
+          <p:nvPr/>
+        </p:nvSpPr>
+        <p:spPr>
+          <a:xfrm>
+            <a:off x="386110" y="3618381"/>
+            <a:ext cx="697236" cy="261610"/>
+          </a:xfrm>
+          <a:prstGeom prst="rect">
+            <a:avLst/>
+          </a:prstGeom>
+          <a:noFill/>
+        </p:spPr>
+        <p:txBody>
+          <a:bodyPr wrap="square" rtlCol="0">
+            <a:spAutoFit/>
+          </a:bodyPr>
+          <a:lstStyle/>
+          <a:p>
+            <a:r>
+              <a:rPr lang="en-US" altLang="ko-KR" sz="1050"/>
+              <a:t>+ State</a:t>
+            </a:r>
+            <a:endParaRPr lang="ko-KR" altLang="en-US" sz="1050"/>
+          </a:p>
+        </p:txBody>
+      </p:sp>
+      <p:sp>
+        <p:nvSpPr>
+          <p:cNvPr id="9" name="TextBox 8">
+            <a:extLst>
+              <a:ext uri="{FF2B5EF4-FFF2-40B4-BE49-F238E27FC236}">
+                <a16:creationId xmlns:a16="http://schemas.microsoft.com/office/drawing/2014/main" id="{BF9ECC9F-7B44-E9E5-0252-3457382FB312}"/>
+              </a:ext>
+            </a:extLst>
+          </p:cNvPr>
+          <p:cNvSpPr txBox="1"/>
+          <p:nvPr/>
+        </p:nvSpPr>
+        <p:spPr>
+          <a:xfrm>
+            <a:off x="720979" y="3888530"/>
+            <a:ext cx="1494958" cy="253916"/>
+          </a:xfrm>
+          <a:prstGeom prst="rect">
+            <a:avLst/>
+          </a:prstGeom>
+          <a:noFill/>
+        </p:spPr>
+        <p:txBody>
+          <a:bodyPr wrap="square" rtlCol="0">
+            <a:spAutoFit/>
+          </a:bodyPr>
+          <a:lstStyle/>
+          <a:p>
+            <a:r>
+              <a:rPr lang="en-US" altLang="ko-KR" sz="1050"/>
+              <a:t>rows  - array</a:t>
+            </a:r>
+            <a:endParaRPr lang="ko-KR" altLang="en-US" sz="1050"/>
+          </a:p>
+        </p:txBody>
+      </p:sp>
+      <p:sp>
+        <p:nvSpPr>
+          <p:cNvPr id="10" name="TextBox 9">
+            <a:extLst>
+              <a:ext uri="{FF2B5EF4-FFF2-40B4-BE49-F238E27FC236}">
+                <a16:creationId xmlns:a16="http://schemas.microsoft.com/office/drawing/2014/main" id="{54C288DB-6304-0694-8C39-F4C2FAE8CB40}"/>
+              </a:ext>
+            </a:extLst>
+          </p:cNvPr>
+          <p:cNvSpPr txBox="1"/>
+          <p:nvPr/>
+        </p:nvSpPr>
+        <p:spPr>
+          <a:xfrm>
+            <a:off x="720979" y="4140844"/>
+            <a:ext cx="1494958" cy="253916"/>
+          </a:xfrm>
+          <a:prstGeom prst="rect">
+            <a:avLst/>
+          </a:prstGeom>
+          <a:noFill/>
+        </p:spPr>
+        <p:txBody>
+          <a:bodyPr wrap="square" rtlCol="0">
+            <a:spAutoFit/>
+          </a:bodyPr>
+          <a:lstStyle/>
+          <a:p>
+            <a:r>
+              <a:rPr lang="en-US" altLang="ko-KR" sz="1050"/>
+              <a:t>selectedRow  - null</a:t>
+            </a:r>
+            <a:endParaRPr lang="ko-KR" altLang="en-US" sz="1050"/>
+          </a:p>
+        </p:txBody>
+      </p:sp>
+      <p:sp>
+        <p:nvSpPr>
+          <p:cNvPr id="11" name="TextBox 10">
+            <a:extLst>
+              <a:ext uri="{FF2B5EF4-FFF2-40B4-BE49-F238E27FC236}">
+                <a16:creationId xmlns:a16="http://schemas.microsoft.com/office/drawing/2014/main" id="{E719486E-3A0D-63CF-C637-E4C68AA62843}"/>
+              </a:ext>
+            </a:extLst>
+          </p:cNvPr>
+          <p:cNvSpPr txBox="1"/>
+          <p:nvPr/>
+        </p:nvSpPr>
+        <p:spPr>
+          <a:xfrm>
+            <a:off x="720979" y="4382863"/>
+            <a:ext cx="1494958" cy="253916"/>
+          </a:xfrm>
+          <a:prstGeom prst="rect">
+            <a:avLst/>
+          </a:prstGeom>
+          <a:noFill/>
+        </p:spPr>
+        <p:txBody>
+          <a:bodyPr wrap="square" rtlCol="0">
+            <a:spAutoFit/>
+          </a:bodyPr>
+          <a:lstStyle/>
+          <a:p>
+            <a:r>
+              <a:rPr lang="en-US" altLang="ko-KR" sz="1050"/>
+              <a:t>loading  - boolean</a:t>
+            </a:r>
+            <a:endParaRPr lang="ko-KR" altLang="en-US" sz="1050"/>
+          </a:p>
+        </p:txBody>
+      </p:sp>
+      <p:sp>
+        <p:nvSpPr>
+          <p:cNvPr id="12" name="TextBox 11">
+            <a:extLst>
+              <a:ext uri="{FF2B5EF4-FFF2-40B4-BE49-F238E27FC236}">
+                <a16:creationId xmlns:a16="http://schemas.microsoft.com/office/drawing/2014/main" id="{54767512-9921-ACE6-3F5A-722C474259A5}"/>
+              </a:ext>
+            </a:extLst>
+          </p:cNvPr>
+          <p:cNvSpPr txBox="1"/>
+          <p:nvPr/>
+        </p:nvSpPr>
+        <p:spPr>
+          <a:xfrm>
+            <a:off x="551644" y="4653395"/>
+            <a:ext cx="1494958" cy="253916"/>
+          </a:xfrm>
+          <a:prstGeom prst="rect">
+            <a:avLst/>
+          </a:prstGeom>
+          <a:noFill/>
+        </p:spPr>
+        <p:txBody>
+          <a:bodyPr wrap="square" rtlCol="0">
+            <a:spAutoFit/>
+          </a:bodyPr>
+          <a:lstStyle/>
+          <a:p>
+            <a:r>
+              <a:rPr lang="en-US" altLang="ko-KR" sz="1050"/>
+              <a:t>+ entity - object</a:t>
+            </a:r>
+            <a:endParaRPr lang="ko-KR" altLang="en-US" sz="1050"/>
+          </a:p>
+        </p:txBody>
+      </p:sp>
+      <p:cxnSp>
+        <p:nvCxnSpPr>
+          <p:cNvPr id="13" name="직선 연결선 12">
+            <a:extLst>
+              <a:ext uri="{FF2B5EF4-FFF2-40B4-BE49-F238E27FC236}">
+                <a16:creationId xmlns:a16="http://schemas.microsoft.com/office/drawing/2014/main" id="{952EEC91-EA2B-AA1D-E58A-6415E9D357C2}"/>
+              </a:ext>
+            </a:extLst>
+          </p:cNvPr>
+          <p:cNvCxnSpPr>
+            <a:cxnSpLocks/>
+          </p:cNvCxnSpPr>
+          <p:nvPr/>
+        </p:nvCxnSpPr>
+        <p:spPr>
+          <a:xfrm>
+            <a:off x="635864" y="3901095"/>
+            <a:ext cx="0" cy="735684"/>
+          </a:xfrm>
+          <a:prstGeom prst="line">
+            <a:avLst/>
+          </a:prstGeom>
+          <a:ln w="3175">
+            <a:solidFill>
+              <a:schemeClr val="tx1">
+                <a:lumMod val="65000"/>
+                <a:lumOff val="35000"/>
+              </a:schemeClr>
+            </a:solidFill>
+          </a:ln>
+        </p:spPr>
+        <p:style>
+          <a:lnRef idx="2">
+            <a:schemeClr val="accent1"/>
+          </a:lnRef>
+          <a:fillRef idx="0">
+            <a:schemeClr val="accent1"/>
+          </a:fillRef>
+          <a:effectRef idx="1">
+            <a:schemeClr val="accent1"/>
+          </a:effectRef>
+          <a:fontRef idx="minor">
+            <a:schemeClr val="tx1"/>
+          </a:fontRef>
+        </p:style>
+      </p:cxnSp>
+      <p:cxnSp>
+        <p:nvCxnSpPr>
+          <p:cNvPr id="14" name="직선 연결선 13">
+            <a:extLst>
+              <a:ext uri="{FF2B5EF4-FFF2-40B4-BE49-F238E27FC236}">
+                <a16:creationId xmlns:a16="http://schemas.microsoft.com/office/drawing/2014/main" id="{44B1DD92-105F-A7DE-F6BA-83BCDA02F7AE}"/>
+              </a:ext>
+            </a:extLst>
+          </p:cNvPr>
+          <p:cNvCxnSpPr>
+            <a:cxnSpLocks/>
+          </p:cNvCxnSpPr>
+          <p:nvPr/>
+        </p:nvCxnSpPr>
+        <p:spPr>
+          <a:xfrm>
+            <a:off x="898330" y="4951009"/>
+            <a:ext cx="0" cy="444808"/>
+          </a:xfrm>
+          <a:prstGeom prst="line">
+            <a:avLst/>
+          </a:prstGeom>
+          <a:ln w="3175">
+            <a:solidFill>
+              <a:schemeClr val="tx1">
+                <a:lumMod val="65000"/>
+                <a:lumOff val="35000"/>
+              </a:schemeClr>
+            </a:solidFill>
+          </a:ln>
+        </p:spPr>
+        <p:style>
+          <a:lnRef idx="2">
+            <a:schemeClr val="accent1"/>
+          </a:lnRef>
+          <a:fillRef idx="0">
+            <a:schemeClr val="accent1"/>
+          </a:fillRef>
+          <a:effectRef idx="1">
+            <a:schemeClr val="accent1"/>
+          </a:effectRef>
+          <a:fontRef idx="minor">
+            <a:schemeClr val="tx1"/>
+          </a:fontRef>
+        </p:style>
+      </p:cxnSp>
+      <p:sp>
+        <p:nvSpPr>
+          <p:cNvPr id="15" name="TextBox 14">
+            <a:extLst>
+              <a:ext uri="{FF2B5EF4-FFF2-40B4-BE49-F238E27FC236}">
+                <a16:creationId xmlns:a16="http://schemas.microsoft.com/office/drawing/2014/main" id="{96CAF478-CE72-890B-FFE1-BAC275FF16E7}"/>
+              </a:ext>
+            </a:extLst>
+          </p:cNvPr>
+          <p:cNvSpPr txBox="1"/>
+          <p:nvPr/>
+        </p:nvSpPr>
+        <p:spPr>
+          <a:xfrm>
+            <a:off x="970746" y="5199237"/>
+            <a:ext cx="1494958" cy="253916"/>
+          </a:xfrm>
+          <a:prstGeom prst="rect">
+            <a:avLst/>
+          </a:prstGeom>
+          <a:noFill/>
+        </p:spPr>
+        <p:txBody>
+          <a:bodyPr wrap="square" rtlCol="0">
+            <a:spAutoFit/>
+          </a:bodyPr>
+          <a:lstStyle/>
+          <a:p>
+            <a:r>
+              <a:rPr lang="en-US" altLang="ko-KR" sz="1050"/>
+              <a:t>name  - null</a:t>
+            </a:r>
+            <a:endParaRPr lang="ko-KR" altLang="en-US" sz="1050"/>
+          </a:p>
+        </p:txBody>
+      </p:sp>
+      <p:sp>
+        <p:nvSpPr>
+          <p:cNvPr id="16" name="TextBox 15">
+            <a:extLst>
+              <a:ext uri="{FF2B5EF4-FFF2-40B4-BE49-F238E27FC236}">
+                <a16:creationId xmlns:a16="http://schemas.microsoft.com/office/drawing/2014/main" id="{B6AD741C-288D-DBAC-1F19-36DCCD777B43}"/>
+              </a:ext>
+            </a:extLst>
+          </p:cNvPr>
+          <p:cNvSpPr txBox="1"/>
+          <p:nvPr/>
+        </p:nvSpPr>
+        <p:spPr>
+          <a:xfrm>
+            <a:off x="970746" y="4942582"/>
+            <a:ext cx="1494958" cy="253916"/>
+          </a:xfrm>
+          <a:prstGeom prst="rect">
+            <a:avLst/>
+          </a:prstGeom>
+          <a:noFill/>
+        </p:spPr>
+        <p:txBody>
+          <a:bodyPr wrap="square" rtlCol="0">
+            <a:spAutoFit/>
+          </a:bodyPr>
+          <a:lstStyle/>
+          <a:p>
+            <a:r>
+              <a:rPr lang="en-US" altLang="ko-KR" sz="1050"/>
+              <a:t>id  - null</a:t>
+            </a:r>
+            <a:endParaRPr lang="ko-KR" altLang="en-US" sz="1050"/>
+          </a:p>
+        </p:txBody>
+      </p:sp>
+      <p:sp>
+        <p:nvSpPr>
+          <p:cNvPr id="17" name="사각형: 둥근 모서리 16">
+            <a:extLst>
+              <a:ext uri="{FF2B5EF4-FFF2-40B4-BE49-F238E27FC236}">
+                <a16:creationId xmlns:a16="http://schemas.microsoft.com/office/drawing/2014/main" id="{A378B204-9934-AAAC-23DD-E9A6BA8B02FF}"/>
+              </a:ext>
+            </a:extLst>
+          </p:cNvPr>
+          <p:cNvSpPr/>
+          <p:nvPr/>
+        </p:nvSpPr>
+        <p:spPr>
+          <a:xfrm>
+            <a:off x="421504" y="3631550"/>
+            <a:ext cx="794089" cy="273095"/>
+          </a:xfrm>
+          <a:prstGeom prst="roundRect">
+            <a:avLst/>
+          </a:prstGeom>
+          <a:noFill/>
+          <a:ln>
+            <a:solidFill>
+              <a:srgbClr val="FF0000"/>
+            </a:solidFill>
+          </a:ln>
+        </p:spPr>
+        <p:style>
+          <a:lnRef idx="2">
+            <a:schemeClr val="accent1">
+              <a:shade val="15000"/>
+            </a:schemeClr>
+          </a:lnRef>
+          <a:fillRef idx="1">
+            <a:schemeClr val="accent1"/>
+          </a:fillRef>
+          <a:effectRef idx="0">
+            <a:schemeClr val="accent1"/>
+          </a:effectRef>
+          <a:fontRef idx="minor">
+            <a:schemeClr val="lt1"/>
+          </a:fontRef>
+        </p:style>
+        <p:txBody>
+          <a:bodyPr rtlCol="0" anchor="ctr"/>
+          <a:lstStyle/>
+          <a:p>
+            <a:pPr algn="ctr"/>
+            <a:endParaRPr lang="ko-KR" altLang="en-US"/>
+          </a:p>
+        </p:txBody>
+      </p:sp>
+      <p:sp>
+        <p:nvSpPr>
+          <p:cNvPr id="18" name="화살표: 왼쪽으로 구부러짐 17">
+            <a:extLst>
+              <a:ext uri="{FF2B5EF4-FFF2-40B4-BE49-F238E27FC236}">
+                <a16:creationId xmlns:a16="http://schemas.microsoft.com/office/drawing/2014/main" id="{5848471E-0FDF-00CD-7034-3DF02D3ED557}"/>
+              </a:ext>
+            </a:extLst>
+          </p:cNvPr>
+          <p:cNvSpPr/>
+          <p:nvPr/>
+        </p:nvSpPr>
+        <p:spPr>
+          <a:xfrm rot="2982620">
+            <a:off x="4554846" y="3839655"/>
+            <a:ext cx="485192" cy="1324042"/>
+          </a:xfrm>
+          <a:prstGeom prst="curvedLeftArrow">
+            <a:avLst/>
+          </a:prstGeom>
+        </p:spPr>
+        <p:style>
+          <a:lnRef idx="2">
+            <a:schemeClr val="accent1">
+              <a:shade val="15000"/>
+            </a:schemeClr>
+          </a:lnRef>
+          <a:fillRef idx="1">
+            <a:schemeClr val="accent1"/>
+          </a:fillRef>
+          <a:effectRef idx="0">
+            <a:schemeClr val="accent1"/>
+          </a:effectRef>
+          <a:fontRef idx="minor">
+            <a:schemeClr val="lt1"/>
+          </a:fontRef>
+        </p:style>
+        <p:txBody>
+          <a:bodyPr rtlCol="0" anchor="ctr"/>
+          <a:lstStyle/>
+          <a:p>
+            <a:pPr algn="ctr"/>
+            <a:endParaRPr lang="ko-KR" altLang="en-US">
+              <a:solidFill>
+                <a:schemeClr val="tx1"/>
+              </a:solidFill>
+            </a:endParaRPr>
+          </a:p>
+        </p:txBody>
+      </p:sp>
+    </p:spTree>
+    <p:extLst>
+      <p:ext uri="{BB962C8B-B14F-4D97-AF65-F5344CB8AC3E}">
+        <p14:creationId xmlns:p14="http://schemas.microsoft.com/office/powerpoint/2010/main" val="1092084009"/>
+      </p:ext>
+    </p:extLst>
+  </p:cSld>
+  <p:clrMapOvr>
+    <a:masterClrMapping/>
+  </p:clrMapOvr>
+</p:sld>
+</file>
+
+<file path=ppt/slides/slide5.xml><?xml version="1.0" encoding="utf-8"?>
+<p:sld xmlns:a="http://schemas.openxmlformats.org/drawingml/2006/main" xmlns:r="http://schemas.openxmlformats.org/officeDocument/2006/relationships" xmlns:p="http://schemas.openxmlformats.org/presentationml/2006/main">
+  <p:cSld>
+    <p:spTree>
+      <p:nvGrpSpPr>
+        <p:cNvPr id="1" name=""/>
+        <p:cNvGrpSpPr/>
+        <p:nvPr/>
+      </p:nvGrpSpPr>
+      <p:grpSpPr>
+        <a:xfrm>
+          <a:off x="0" y="0"/>
+          <a:ext cx="0" cy="0"/>
+          <a:chOff x="0" y="0"/>
+          <a:chExt cx="0" cy="0"/>
+        </a:xfrm>
+      </p:grpSpPr>
+      <p:pic>
+        <p:nvPicPr>
+          <p:cNvPr id="4" name="그림 3">
+            <a:extLst>
+              <a:ext uri="{FF2B5EF4-FFF2-40B4-BE49-F238E27FC236}">
+                <a16:creationId xmlns:a16="http://schemas.microsoft.com/office/drawing/2014/main" id="{80A95EBA-20F6-CF27-D0FC-B0C59D663724}"/>
+              </a:ext>
+            </a:extLst>
+          </p:cNvPr>
+          <p:cNvPicPr>
+            <a:picLocks noChangeAspect="1"/>
+          </p:cNvPicPr>
+          <p:nvPr/>
+        </p:nvPicPr>
+        <p:blipFill>
+          <a:blip r:embed="rId2"/>
+          <a:stretch>
+            <a:fillRect/>
+          </a:stretch>
+        </p:blipFill>
+        <p:spPr>
+          <a:xfrm>
+            <a:off x="470196" y="345232"/>
+            <a:ext cx="6977915" cy="5868955"/>
+          </a:xfrm>
+          <a:prstGeom prst="rect">
+            <a:avLst/>
+          </a:prstGeom>
+        </p:spPr>
+      </p:pic>
+      <p:sp>
+        <p:nvSpPr>
+          <p:cNvPr id="5" name="사각형: 모서리가 접힌 도형 4">
+            <a:extLst>
+              <a:ext uri="{FF2B5EF4-FFF2-40B4-BE49-F238E27FC236}">
+                <a16:creationId xmlns:a16="http://schemas.microsoft.com/office/drawing/2014/main" id="{B3CDE165-36B8-EA73-386F-86A4E48400E3}"/>
+              </a:ext>
+            </a:extLst>
+          </p:cNvPr>
+          <p:cNvSpPr/>
+          <p:nvPr/>
+        </p:nvSpPr>
+        <p:spPr>
+          <a:xfrm>
+            <a:off x="7536166" y="345232"/>
+            <a:ext cx="4285719" cy="5868954"/>
+          </a:xfrm>
+          <a:prstGeom prst="foldedCorner">
+            <a:avLst>
+              <a:gd name="adj" fmla="val 3878"/>
+            </a:avLst>
+          </a:prstGeom>
+          <a:solidFill>
+            <a:schemeClr val="bg1">
+              <a:lumMod val="95000"/>
+            </a:schemeClr>
+          </a:solidFill>
+          <a:ln w="3175">
+            <a:solidFill>
+              <a:schemeClr val="tx1">
+                <a:lumMod val="50000"/>
+                <a:lumOff val="50000"/>
+              </a:schemeClr>
+            </a:solidFill>
+          </a:ln>
+        </p:spPr>
+        <p:style>
+          <a:lnRef idx="2">
+            <a:schemeClr val="accent1">
+              <a:shade val="15000"/>
+            </a:schemeClr>
+          </a:lnRef>
+          <a:fillRef idx="1">
+            <a:schemeClr val="accent1"/>
+          </a:fillRef>
+          <a:effectRef idx="0">
+            <a:schemeClr val="accent1"/>
+          </a:effectRef>
+          <a:fontRef idx="minor">
+            <a:schemeClr val="lt1"/>
+          </a:fontRef>
+        </p:style>
+        <p:txBody>
+          <a:bodyPr rtlCol="0" anchor="t" anchorCtr="0"/>
+          <a:lstStyle/>
+          <a:p>
+            <a:pPr marL="171450" indent="-171450">
+              <a:buFontTx/>
+              <a:buChar char="-"/>
+            </a:pPr>
+            <a:r>
+              <a:rPr lang="ko-KR" altLang="en-US" sz="1200">
+                <a:solidFill>
+                  <a:schemeClr val="tx1">
+                    <a:lumMod val="75000"/>
+                    <a:lumOff val="25000"/>
+                  </a:schemeClr>
+                </a:solidFill>
+              </a:rPr>
+              <a:t>수정사항</a:t>
+            </a:r>
+            <a:endParaRPr lang="en-US" altLang="ko-KR" sz="1200">
+              <a:solidFill>
+                <a:schemeClr val="tx1">
+                  <a:lumMod val="75000"/>
+                  <a:lumOff val="25000"/>
+                </a:schemeClr>
+              </a:solidFill>
+            </a:endParaRPr>
+          </a:p>
+          <a:p>
+            <a:pPr marL="228600" indent="-228600">
+              <a:buAutoNum type="arabicPeriod"/>
+            </a:pPr>
+            <a:r>
+              <a:rPr lang="en-US" altLang="ko-KR" sz="1200">
+                <a:solidFill>
+                  <a:schemeClr val="tx1">
+                    <a:lumMod val="75000"/>
+                    <a:lumOff val="25000"/>
+                  </a:schemeClr>
+                </a:solidFill>
+              </a:rPr>
+              <a:t>storeName </a:t>
+            </a:r>
+            <a:r>
+              <a:rPr lang="ko-KR" altLang="en-US" sz="1200">
+                <a:solidFill>
+                  <a:schemeClr val="tx1">
+                    <a:lumMod val="75000"/>
+                    <a:lumOff val="25000"/>
+                  </a:schemeClr>
+                </a:solidFill>
+              </a:rPr>
+              <a:t>템 이름옆에 설정 아이콘을 추가해서 클릭하면 현재 파일 정보를 설정할 수 있는 팝업창 표시</a:t>
+            </a:r>
+            <a:endParaRPr lang="en-US" altLang="ko-KR" sz="1200">
+              <a:solidFill>
+                <a:schemeClr val="tx1">
+                  <a:lumMod val="75000"/>
+                  <a:lumOff val="25000"/>
+                </a:schemeClr>
+              </a:solidFill>
+            </a:endParaRPr>
+          </a:p>
+          <a:p>
+            <a:r>
+              <a:rPr lang="en-US" altLang="ko-KR" sz="1200">
+                <a:solidFill>
+                  <a:schemeClr val="tx1">
+                    <a:lumMod val="75000"/>
+                    <a:lumOff val="25000"/>
+                  </a:schemeClr>
+                </a:solidFill>
+              </a:rPr>
+              <a:t>  Store </a:t>
+            </a:r>
+            <a:r>
+              <a:rPr lang="ko-KR" altLang="en-US" sz="1200">
+                <a:solidFill>
+                  <a:schemeClr val="tx1">
+                    <a:lumMod val="75000"/>
+                    <a:lumOff val="25000"/>
+                  </a:schemeClr>
+                </a:solidFill>
+              </a:rPr>
+              <a:t>신규 추가 팝업 처럼 다만 경로는 변경할 수 없도록</a:t>
+            </a:r>
+            <a:endParaRPr lang="en-US" altLang="ko-KR" sz="1200">
+              <a:solidFill>
+                <a:schemeClr val="tx1">
+                  <a:lumMod val="75000"/>
+                  <a:lumOff val="25000"/>
+                </a:schemeClr>
+              </a:solidFill>
+            </a:endParaRPr>
+          </a:p>
+          <a:p>
+            <a:endParaRPr lang="en-US" altLang="ko-KR" sz="1200">
+              <a:solidFill>
+                <a:schemeClr val="tx1">
+                  <a:lumMod val="75000"/>
+                  <a:lumOff val="25000"/>
+                </a:schemeClr>
+              </a:solidFill>
+            </a:endParaRPr>
+          </a:p>
+          <a:p>
+            <a:endParaRPr lang="en-US" altLang="ko-KR" sz="1200">
+              <a:solidFill>
+                <a:schemeClr val="tx1">
+                  <a:lumMod val="75000"/>
+                  <a:lumOff val="25000"/>
+                </a:schemeClr>
+              </a:solidFill>
+            </a:endParaRPr>
+          </a:p>
+          <a:p>
+            <a:endParaRPr lang="en-US" altLang="ko-KR" sz="1200">
+              <a:solidFill>
+                <a:schemeClr val="tx1">
+                  <a:lumMod val="75000"/>
+                  <a:lumOff val="25000"/>
+                </a:schemeClr>
+              </a:solidFill>
+            </a:endParaRPr>
+          </a:p>
+          <a:p>
+            <a:endParaRPr lang="en-US" altLang="ko-KR" sz="1200">
+              <a:solidFill>
+                <a:schemeClr val="tx1">
+                  <a:lumMod val="75000"/>
+                  <a:lumOff val="25000"/>
+                </a:schemeClr>
+              </a:solidFill>
+            </a:endParaRPr>
+          </a:p>
+          <a:p>
+            <a:endParaRPr lang="en-US" altLang="ko-KR" sz="1200">
+              <a:solidFill>
+                <a:schemeClr val="tx1">
+                  <a:lumMod val="75000"/>
+                  <a:lumOff val="25000"/>
+                </a:schemeClr>
+              </a:solidFill>
+            </a:endParaRPr>
+          </a:p>
+          <a:p>
+            <a:endParaRPr lang="en-US" altLang="ko-KR" sz="1200">
+              <a:solidFill>
+                <a:schemeClr val="tx1">
+                  <a:lumMod val="75000"/>
+                  <a:lumOff val="25000"/>
+                </a:schemeClr>
+              </a:solidFill>
+            </a:endParaRPr>
+          </a:p>
+          <a:p>
+            <a:endParaRPr lang="en-US" altLang="ko-KR" sz="1200">
+              <a:solidFill>
+                <a:schemeClr val="tx1">
+                  <a:lumMod val="75000"/>
+                  <a:lumOff val="25000"/>
+                </a:schemeClr>
+              </a:solidFill>
+            </a:endParaRPr>
+          </a:p>
+          <a:p>
+            <a:endParaRPr lang="en-US" altLang="ko-KR" sz="1200">
+              <a:solidFill>
+                <a:schemeClr val="tx1">
+                  <a:lumMod val="75000"/>
+                  <a:lumOff val="25000"/>
+                </a:schemeClr>
+              </a:solidFill>
+            </a:endParaRPr>
+          </a:p>
+          <a:p>
+            <a:endParaRPr lang="en-US" altLang="ko-KR" sz="1200">
+              <a:solidFill>
+                <a:schemeClr val="tx1">
+                  <a:lumMod val="75000"/>
+                  <a:lumOff val="25000"/>
+                </a:schemeClr>
+              </a:solidFill>
+            </a:endParaRPr>
+          </a:p>
+          <a:p>
+            <a:endParaRPr lang="en-US" altLang="ko-KR" sz="1200">
+              <a:solidFill>
+                <a:schemeClr val="tx1">
+                  <a:lumMod val="75000"/>
+                  <a:lumOff val="25000"/>
+                </a:schemeClr>
+              </a:solidFill>
+            </a:endParaRPr>
+          </a:p>
+          <a:p>
+            <a:endParaRPr lang="en-US" altLang="ko-KR" sz="1200">
+              <a:solidFill>
+                <a:schemeClr val="tx1">
+                  <a:lumMod val="75000"/>
+                  <a:lumOff val="25000"/>
+                </a:schemeClr>
+              </a:solidFill>
+            </a:endParaRPr>
+          </a:p>
+          <a:p>
+            <a:endParaRPr lang="en-US" altLang="ko-KR" sz="1200">
+              <a:solidFill>
+                <a:schemeClr val="tx1">
+                  <a:lumMod val="75000"/>
+                  <a:lumOff val="25000"/>
+                </a:schemeClr>
+              </a:solidFill>
+            </a:endParaRPr>
+          </a:p>
+          <a:p>
+            <a:endParaRPr lang="en-US" altLang="ko-KR" sz="1200">
+              <a:solidFill>
+                <a:schemeClr val="tx1">
+                  <a:lumMod val="75000"/>
+                  <a:lumOff val="25000"/>
+                </a:schemeClr>
+              </a:solidFill>
+            </a:endParaRPr>
+          </a:p>
+          <a:p>
+            <a:endParaRPr lang="en-US" altLang="ko-KR" sz="1200">
+              <a:solidFill>
+                <a:schemeClr val="tx1">
+                  <a:lumMod val="75000"/>
+                  <a:lumOff val="25000"/>
+                </a:schemeClr>
+              </a:solidFill>
+            </a:endParaRPr>
+          </a:p>
+          <a:p>
+            <a:endParaRPr lang="en-US" altLang="ko-KR" sz="1200">
+              <a:solidFill>
+                <a:schemeClr val="tx1">
+                  <a:lumMod val="75000"/>
+                  <a:lumOff val="25000"/>
+                </a:schemeClr>
+              </a:solidFill>
+            </a:endParaRPr>
+          </a:p>
+          <a:p>
+            <a:endParaRPr lang="en-US" altLang="ko-KR" sz="1200">
+              <a:solidFill>
+                <a:schemeClr val="tx1">
+                  <a:lumMod val="75000"/>
+                  <a:lumOff val="25000"/>
+                </a:schemeClr>
+              </a:solidFill>
+            </a:endParaRPr>
+          </a:p>
+          <a:p>
+            <a:endParaRPr lang="en-US" altLang="ko-KR" sz="1200">
+              <a:solidFill>
+                <a:schemeClr val="tx1">
+                  <a:lumMod val="75000"/>
+                  <a:lumOff val="25000"/>
+                </a:schemeClr>
+              </a:solidFill>
+            </a:endParaRPr>
+          </a:p>
+          <a:p>
+            <a:endParaRPr lang="en-US" altLang="ko-KR" sz="1200">
+              <a:solidFill>
+                <a:schemeClr val="tx1">
+                  <a:lumMod val="75000"/>
+                  <a:lumOff val="25000"/>
+                </a:schemeClr>
+              </a:solidFill>
+            </a:endParaRPr>
+          </a:p>
+          <a:p>
+            <a:r>
+              <a:rPr lang="en-US" altLang="ko-KR" sz="1200">
+                <a:solidFill>
+                  <a:schemeClr val="tx1">
+                    <a:lumMod val="75000"/>
+                    <a:lumOff val="25000"/>
+                  </a:schemeClr>
+                </a:solidFill>
+              </a:rPr>
+              <a:t>2. Pinia Store </a:t>
+            </a:r>
+            <a:r>
+              <a:rPr lang="ko-KR" altLang="en-US" sz="1200">
+                <a:solidFill>
+                  <a:schemeClr val="tx1">
+                    <a:lumMod val="75000"/>
+                    <a:lumOff val="25000"/>
+                  </a:schemeClr>
+                </a:solidFill>
+              </a:rPr>
+              <a:t>창 삭제 바람</a:t>
+            </a:r>
+            <a:r>
+              <a:rPr lang="en-US" altLang="ko-KR" sz="1200">
+                <a:solidFill>
+                  <a:schemeClr val="tx1">
+                    <a:lumMod val="75000"/>
+                    <a:lumOff val="25000"/>
+                  </a:schemeClr>
+                </a:solidFill>
+              </a:rPr>
+              <a:t>.</a:t>
+            </a:r>
+          </a:p>
+          <a:p>
+            <a:r>
+              <a:rPr lang="en-US" altLang="ko-KR" sz="1200">
+                <a:solidFill>
+                  <a:schemeClr val="tx1">
+                    <a:lumMod val="75000"/>
+                    <a:lumOff val="25000"/>
+                  </a:schemeClr>
+                </a:solidFill>
+              </a:rPr>
+              <a:t>   </a:t>
+            </a:r>
+            <a:r>
+              <a:rPr lang="ko-KR" altLang="en-US" sz="1200">
+                <a:solidFill>
+                  <a:schemeClr val="tx1">
+                    <a:lumMod val="75000"/>
+                    <a:lumOff val="25000"/>
+                  </a:schemeClr>
+                </a:solidFill>
+              </a:rPr>
+              <a:t>파일 설정 창으로 대신함</a:t>
+            </a:r>
+            <a:r>
+              <a:rPr lang="en-US" altLang="ko-KR" sz="1200">
+                <a:solidFill>
+                  <a:schemeClr val="tx1">
+                    <a:lumMod val="75000"/>
+                    <a:lumOff val="25000"/>
+                  </a:schemeClr>
+                </a:solidFill>
+              </a:rPr>
+              <a:t>.</a:t>
+            </a:r>
+          </a:p>
+          <a:p>
+            <a:endParaRPr lang="en-US" altLang="ko-KR" sz="1200">
+              <a:solidFill>
+                <a:schemeClr val="tx1">
+                  <a:lumMod val="75000"/>
+                  <a:lumOff val="25000"/>
+                </a:schemeClr>
+              </a:solidFill>
+            </a:endParaRPr>
+          </a:p>
+          <a:p>
+            <a:r>
+              <a:rPr lang="en-US" altLang="ko-KR" sz="1200">
+                <a:solidFill>
+                  <a:schemeClr val="tx1">
+                    <a:lumMod val="75000"/>
+                    <a:lumOff val="25000"/>
+                  </a:schemeClr>
+                </a:solidFill>
+              </a:rPr>
+              <a:t>3. State, Getters, Actions </a:t>
+            </a:r>
+            <a:r>
+              <a:rPr lang="ko-KR" altLang="en-US" sz="1200">
+                <a:solidFill>
+                  <a:schemeClr val="tx1">
+                    <a:lumMod val="75000"/>
+                    <a:lumOff val="25000"/>
+                  </a:schemeClr>
+                </a:solidFill>
+              </a:rPr>
+              <a:t>테이틀창 높이가 큼 좀더 줄이도록 수정해줘 </a:t>
+            </a:r>
+            <a:endParaRPr lang="en-US" altLang="ko-KR" sz="1200">
+              <a:solidFill>
+                <a:schemeClr val="tx1">
+                  <a:lumMod val="75000"/>
+                  <a:lumOff val="25000"/>
+                </a:schemeClr>
+              </a:solidFill>
+            </a:endParaRPr>
+          </a:p>
+          <a:p>
+            <a:pPr marL="228600" indent="-228600">
+              <a:buAutoNum type="arabicPeriod"/>
+            </a:pPr>
+            <a:endParaRPr lang="en-US" altLang="ko-KR" sz="1200" b="0">
+              <a:solidFill>
+                <a:schemeClr val="tx1">
+                  <a:lumMod val="75000"/>
+                  <a:lumOff val="25000"/>
+                </a:schemeClr>
+              </a:solidFill>
+              <a:effectLst/>
+              <a:latin typeface="Consolas" panose="020B0609020204030204" pitchFamily="49" charset="0"/>
+            </a:endParaRPr>
+          </a:p>
+          <a:p>
+            <a:pPr marL="228600" indent="-228600">
+              <a:buAutoNum type="arabicPeriod"/>
+            </a:pPr>
+            <a:endParaRPr lang="en-US" altLang="ko-KR" sz="1200">
+              <a:solidFill>
+                <a:schemeClr val="tx1">
+                  <a:lumMod val="75000"/>
+                  <a:lumOff val="25000"/>
+                </a:schemeClr>
+              </a:solidFill>
+              <a:latin typeface="Consolas" panose="020B0609020204030204" pitchFamily="49" charset="0"/>
+            </a:endParaRPr>
+          </a:p>
+          <a:p>
+            <a:pPr marL="228600" indent="-228600">
+              <a:buAutoNum type="arabicPeriod"/>
+            </a:pPr>
+            <a:endParaRPr lang="en-US" altLang="ko-KR" sz="1200" b="0">
+              <a:solidFill>
+                <a:srgbClr val="BBBEBF"/>
+              </a:solidFill>
+              <a:effectLst/>
+              <a:latin typeface="Consolas" panose="020B0609020204030204" pitchFamily="49" charset="0"/>
+            </a:endParaRPr>
+          </a:p>
+          <a:p>
+            <a:endParaRPr lang="ko-KR" altLang="en-US" sz="1200">
+              <a:solidFill>
+                <a:schemeClr val="tx1">
+                  <a:lumMod val="75000"/>
+                  <a:lumOff val="25000"/>
+                </a:schemeClr>
+              </a:solidFill>
+            </a:endParaRPr>
+          </a:p>
+        </p:txBody>
+      </p:sp>
+      <p:sp>
+        <p:nvSpPr>
+          <p:cNvPr id="19" name="팔각형 18">
+            <a:extLst>
+              <a:ext uri="{FF2B5EF4-FFF2-40B4-BE49-F238E27FC236}">
+                <a16:creationId xmlns:a16="http://schemas.microsoft.com/office/drawing/2014/main" id="{450521CC-EE90-1530-0BA5-C37869D83BB9}"/>
+              </a:ext>
+            </a:extLst>
+          </p:cNvPr>
+          <p:cNvSpPr/>
+          <p:nvPr/>
+        </p:nvSpPr>
+        <p:spPr>
+          <a:xfrm>
+            <a:off x="1324947" y="709126"/>
+            <a:ext cx="229533" cy="239563"/>
+          </a:xfrm>
+          <a:prstGeom prst="octagon">
+            <a:avLst/>
+          </a:prstGeom>
+          <a:solidFill>
+            <a:schemeClr val="accent2"/>
+          </a:solidFill>
+        </p:spPr>
+        <p:style>
+          <a:lnRef idx="2">
+            <a:schemeClr val="accent1">
+              <a:shade val="15000"/>
+            </a:schemeClr>
+          </a:lnRef>
+          <a:fillRef idx="1">
+            <a:schemeClr val="accent1"/>
+          </a:fillRef>
+          <a:effectRef idx="0">
+            <a:schemeClr val="accent1"/>
+          </a:effectRef>
+          <a:fontRef idx="minor">
+            <a:schemeClr val="lt1"/>
+          </a:fontRef>
+        </p:style>
+        <p:txBody>
+          <a:bodyPr rtlCol="0" anchor="ctr"/>
+          <a:lstStyle/>
+          <a:p>
+            <a:pPr algn="ctr"/>
+            <a:r>
+              <a:rPr lang="en-US" altLang="ko-KR" sz="1050"/>
+              <a:t>1</a:t>
+            </a:r>
+            <a:endParaRPr lang="ko-KR" altLang="en-US" sz="1050"/>
+          </a:p>
+        </p:txBody>
+      </p:sp>
+      <p:pic>
+        <p:nvPicPr>
+          <p:cNvPr id="21" name="그림 20">
+            <a:extLst>
+              <a:ext uri="{FF2B5EF4-FFF2-40B4-BE49-F238E27FC236}">
+                <a16:creationId xmlns:a16="http://schemas.microsoft.com/office/drawing/2014/main" id="{5EEEA838-D7B2-7569-B16D-F1725E262CA2}"/>
+              </a:ext>
+            </a:extLst>
+          </p:cNvPr>
+          <p:cNvPicPr>
+            <a:picLocks noChangeAspect="1"/>
+          </p:cNvPicPr>
+          <p:nvPr/>
+        </p:nvPicPr>
+        <p:blipFill>
+          <a:blip r:embed="rId3"/>
+          <a:stretch>
+            <a:fillRect/>
+          </a:stretch>
+        </p:blipFill>
+        <p:spPr>
+          <a:xfrm>
+            <a:off x="7847720" y="1199449"/>
+            <a:ext cx="2311917" cy="2852084"/>
+          </a:xfrm>
+          <a:prstGeom prst="rect">
+            <a:avLst/>
+          </a:prstGeom>
+        </p:spPr>
+      </p:pic>
+      <p:sp>
+        <p:nvSpPr>
+          <p:cNvPr id="22" name="팔각형 21">
+            <a:extLst>
+              <a:ext uri="{FF2B5EF4-FFF2-40B4-BE49-F238E27FC236}">
+                <a16:creationId xmlns:a16="http://schemas.microsoft.com/office/drawing/2014/main" id="{4269B639-FD77-2887-122E-60154A7B479F}"/>
+              </a:ext>
+            </a:extLst>
+          </p:cNvPr>
+          <p:cNvSpPr/>
+          <p:nvPr/>
+        </p:nvSpPr>
+        <p:spPr>
+          <a:xfrm>
+            <a:off x="1324947" y="1079667"/>
+            <a:ext cx="229533" cy="239563"/>
+          </a:xfrm>
+          <a:prstGeom prst="octagon">
+            <a:avLst/>
+          </a:prstGeom>
+          <a:solidFill>
+            <a:schemeClr val="accent2"/>
+          </a:solidFill>
+        </p:spPr>
+        <p:style>
+          <a:lnRef idx="2">
+            <a:schemeClr val="accent1">
+              <a:shade val="15000"/>
+            </a:schemeClr>
+          </a:lnRef>
+          <a:fillRef idx="1">
+            <a:schemeClr val="accent1"/>
+          </a:fillRef>
+          <a:effectRef idx="0">
+            <a:schemeClr val="accent1"/>
+          </a:effectRef>
+          <a:fontRef idx="minor">
+            <a:schemeClr val="lt1"/>
+          </a:fontRef>
+        </p:style>
+        <p:txBody>
+          <a:bodyPr rtlCol="0" anchor="ctr"/>
+          <a:lstStyle/>
+          <a:p>
+            <a:pPr algn="ctr"/>
+            <a:r>
+              <a:rPr lang="en-US" altLang="ko-KR" sz="1050"/>
+              <a:t>2</a:t>
+            </a:r>
+            <a:endParaRPr lang="ko-KR" altLang="en-US" sz="1050"/>
+          </a:p>
+        </p:txBody>
+      </p:sp>
+    </p:spTree>
+    <p:extLst>
+      <p:ext uri="{BB962C8B-B14F-4D97-AF65-F5344CB8AC3E}">
+        <p14:creationId xmlns:p14="http://schemas.microsoft.com/office/powerpoint/2010/main" val="1896464772"/>
+      </p:ext>
+    </p:extLst>
+  </p:cSld>
+  <p:clrMapOvr>
+    <a:masterClrMapping/>
+  </p:clrMapOvr>
+</p:sld>
+</file>
+
+<file path=ppt/slides/slide6.xml><?xml version="1.0" encoding="utf-8"?>
+<p:sld xmlns:a="http://schemas.openxmlformats.org/drawingml/2006/main" xmlns:r="http://schemas.openxmlformats.org/officeDocument/2006/relationships" xmlns:p="http://schemas.openxmlformats.org/presentationml/2006/main">
+  <p:cSld>
+    <p:spTree>
+      <p:nvGrpSpPr>
+        <p:cNvPr id="1" name=""/>
+        <p:cNvGrpSpPr/>
+        <p:nvPr/>
+      </p:nvGrpSpPr>
+      <p:grpSpPr>
+        <a:xfrm>
+          <a:off x="0" y="0"/>
+          <a:ext cx="0" cy="0"/>
+          <a:chOff x="0" y="0"/>
+          <a:chExt cx="0" cy="0"/>
+        </a:xfrm>
+      </p:grpSpPr>
+      <p:pic>
+        <p:nvPicPr>
+          <p:cNvPr id="3" name="그림 2">
+            <a:extLst>
+              <a:ext uri="{FF2B5EF4-FFF2-40B4-BE49-F238E27FC236}">
+                <a16:creationId xmlns:a16="http://schemas.microsoft.com/office/drawing/2014/main" id="{50E1919F-81FE-811A-C5BA-16404B86B051}"/>
+              </a:ext>
+            </a:extLst>
+          </p:cNvPr>
+          <p:cNvPicPr>
+            <a:picLocks noChangeAspect="1"/>
+          </p:cNvPicPr>
+          <p:nvPr/>
+        </p:nvPicPr>
+        <p:blipFill>
+          <a:blip r:embed="rId2"/>
+          <a:stretch>
+            <a:fillRect/>
+          </a:stretch>
+        </p:blipFill>
+        <p:spPr>
+          <a:xfrm>
+            <a:off x="370115" y="345232"/>
+            <a:ext cx="5964202" cy="5314950"/>
+          </a:xfrm>
+          <a:prstGeom prst="rect">
+            <a:avLst/>
+          </a:prstGeom>
+        </p:spPr>
+      </p:pic>
+      <p:sp>
+        <p:nvSpPr>
+          <p:cNvPr id="6" name="사각형: 모서리가 접힌 도형 5">
+            <a:extLst>
+              <a:ext uri="{FF2B5EF4-FFF2-40B4-BE49-F238E27FC236}">
+                <a16:creationId xmlns:a16="http://schemas.microsoft.com/office/drawing/2014/main" id="{1A85EB86-B3A8-787C-9275-226303A585C3}"/>
+              </a:ext>
+            </a:extLst>
+          </p:cNvPr>
+          <p:cNvSpPr/>
+          <p:nvPr/>
+        </p:nvSpPr>
+        <p:spPr>
+          <a:xfrm>
+            <a:off x="7307566" y="345232"/>
+            <a:ext cx="4285719" cy="5868954"/>
+          </a:xfrm>
+          <a:prstGeom prst="foldedCorner">
+            <a:avLst>
+              <a:gd name="adj" fmla="val 3878"/>
+            </a:avLst>
+          </a:prstGeom>
+          <a:solidFill>
+            <a:schemeClr val="bg1">
+              <a:lumMod val="95000"/>
+            </a:schemeClr>
+          </a:solidFill>
+          <a:ln w="3175">
+            <a:solidFill>
+              <a:schemeClr val="tx1">
+                <a:lumMod val="50000"/>
+                <a:lumOff val="50000"/>
+              </a:schemeClr>
+            </a:solidFill>
+          </a:ln>
+        </p:spPr>
+        <p:style>
+          <a:lnRef idx="2">
+            <a:schemeClr val="accent1">
+              <a:shade val="15000"/>
+            </a:schemeClr>
+          </a:lnRef>
+          <a:fillRef idx="1">
+            <a:schemeClr val="accent1"/>
+          </a:fillRef>
+          <a:effectRef idx="0">
+            <a:schemeClr val="accent1"/>
+          </a:effectRef>
+          <a:fontRef idx="minor">
+            <a:schemeClr val="lt1"/>
+          </a:fontRef>
+        </p:style>
+        <p:txBody>
+          <a:bodyPr rtlCol="0" anchor="t" anchorCtr="0"/>
+          <a:lstStyle/>
+          <a:p>
+            <a:pPr marL="171450" indent="-171450">
+              <a:buFontTx/>
+              <a:buChar char="-"/>
+            </a:pPr>
+            <a:r>
+              <a:rPr lang="ko-KR" altLang="en-US" sz="1200">
+                <a:solidFill>
+                  <a:schemeClr val="tx1">
+                    <a:lumMod val="75000"/>
+                    <a:lumOff val="25000"/>
+                  </a:schemeClr>
+                </a:solidFill>
+              </a:rPr>
+              <a:t>수정사항</a:t>
+            </a:r>
+            <a:endParaRPr lang="en-US" altLang="ko-KR" sz="1200">
+              <a:solidFill>
+                <a:schemeClr val="tx1">
+                  <a:lumMod val="75000"/>
+                  <a:lumOff val="25000"/>
+                </a:schemeClr>
+              </a:solidFill>
+            </a:endParaRPr>
+          </a:p>
+          <a:p>
+            <a:r>
+              <a:rPr lang="en-US" altLang="ko-KR" sz="1200" b="0">
+                <a:solidFill>
+                  <a:schemeClr val="tx1">
+                    <a:lumMod val="75000"/>
+                    <a:lumOff val="25000"/>
+                  </a:schemeClr>
+                </a:solidFill>
+                <a:effectLst/>
+                <a:latin typeface="Consolas" panose="020B0609020204030204" pitchFamily="49" charset="0"/>
+              </a:rPr>
+              <a:t>State, Getters, Action </a:t>
+            </a:r>
+            <a:r>
+              <a:rPr lang="ko-KR" altLang="en-US" sz="1200" b="0">
+                <a:solidFill>
+                  <a:schemeClr val="tx1">
+                    <a:lumMod val="75000"/>
+                    <a:lumOff val="25000"/>
+                  </a:schemeClr>
+                </a:solidFill>
+                <a:effectLst/>
+                <a:latin typeface="Consolas" panose="020B0609020204030204" pitchFamily="49" charset="0"/>
+              </a:rPr>
+              <a:t>높이 줄임</a:t>
+            </a:r>
+            <a:endParaRPr lang="en-US" altLang="ko-KR" sz="1200" b="0">
+              <a:solidFill>
+                <a:schemeClr val="tx1">
+                  <a:lumMod val="75000"/>
+                  <a:lumOff val="25000"/>
+                </a:schemeClr>
+              </a:solidFill>
+              <a:effectLst/>
+              <a:latin typeface="Consolas" panose="020B0609020204030204" pitchFamily="49" charset="0"/>
+            </a:endParaRPr>
+          </a:p>
+          <a:p>
+            <a:pPr marL="228600" indent="-228600">
+              <a:buAutoNum type="arabicPeriod"/>
+            </a:pPr>
+            <a:endParaRPr lang="en-US" altLang="ko-KR" sz="1200">
+              <a:solidFill>
+                <a:schemeClr val="tx1">
+                  <a:lumMod val="75000"/>
+                  <a:lumOff val="25000"/>
+                </a:schemeClr>
+              </a:solidFill>
+              <a:latin typeface="Consolas" panose="020B0609020204030204" pitchFamily="49" charset="0"/>
+            </a:endParaRPr>
+          </a:p>
+          <a:p>
+            <a:pPr marL="228600" indent="-228600">
+              <a:buAutoNum type="arabicPeriod"/>
+            </a:pPr>
+            <a:endParaRPr lang="en-US" altLang="ko-KR" sz="1200" b="0">
+              <a:solidFill>
+                <a:srgbClr val="BBBEBF"/>
+              </a:solidFill>
+              <a:effectLst/>
+              <a:latin typeface="Consolas" panose="020B0609020204030204" pitchFamily="49" charset="0"/>
+            </a:endParaRPr>
+          </a:p>
+          <a:p>
+            <a:endParaRPr lang="ko-KR" altLang="en-US" sz="1200">
+              <a:solidFill>
+                <a:schemeClr val="tx1">
+                  <a:lumMod val="75000"/>
+                  <a:lumOff val="25000"/>
+                </a:schemeClr>
+              </a:solidFill>
+            </a:endParaRPr>
+          </a:p>
+        </p:txBody>
+      </p:sp>
+    </p:spTree>
+    <p:extLst>
+      <p:ext uri="{BB962C8B-B14F-4D97-AF65-F5344CB8AC3E}">
+        <p14:creationId xmlns:p14="http://schemas.microsoft.com/office/powerpoint/2010/main" val="1397965644"/>
+      </p:ext>
+    </p:extLst>
+  </p:cSld>
+  <p:clrMapOvr>
+    <a:masterClrMapping/>
+  </p:clrMapOvr>
+</p:sld>
+</file>
+
+<file path=ppt/slides/slide7.xml><?xml version="1.0" encoding="utf-8"?>
+<p:sld xmlns:a="http://schemas.openxmlformats.org/drawingml/2006/main" xmlns:r="http://schemas.openxmlformats.org/officeDocument/2006/relationships" xmlns:p="http://schemas.openxmlformats.org/presentationml/2006/main">
+  <p:cSld>
+    <p:spTree>
+      <p:nvGrpSpPr>
+        <p:cNvPr id="1" name=""/>
+        <p:cNvGrpSpPr/>
+        <p:nvPr/>
+      </p:nvGrpSpPr>
+      <p:grpSpPr>
+        <a:xfrm>
+          <a:off x="0" y="0"/>
+          <a:ext cx="0" cy="0"/>
+          <a:chOff x="0" y="0"/>
+          <a:chExt cx="0" cy="0"/>
+        </a:xfrm>
+      </p:grpSpPr>
+      <p:pic>
+        <p:nvPicPr>
+          <p:cNvPr id="12" name="그림 11">
+            <a:extLst>
+              <a:ext uri="{FF2B5EF4-FFF2-40B4-BE49-F238E27FC236}">
+                <a16:creationId xmlns:a16="http://schemas.microsoft.com/office/drawing/2014/main" id="{17A74ECA-17A0-DACB-6AE0-6C6247EED6B1}"/>
+              </a:ext>
+            </a:extLst>
+          </p:cNvPr>
+          <p:cNvPicPr>
+            <a:picLocks noChangeAspect="1"/>
+          </p:cNvPicPr>
+          <p:nvPr/>
+        </p:nvPicPr>
+        <p:blipFill>
+          <a:blip r:embed="rId2"/>
+          <a:stretch>
+            <a:fillRect/>
+          </a:stretch>
+        </p:blipFill>
+        <p:spPr>
+          <a:xfrm>
+            <a:off x="484992" y="3779595"/>
+            <a:ext cx="5611008" cy="2295845"/>
+          </a:xfrm>
+          <a:prstGeom prst="rect">
+            <a:avLst/>
+          </a:prstGeom>
+        </p:spPr>
+      </p:pic>
+      <p:pic>
+        <p:nvPicPr>
+          <p:cNvPr id="14" name="그림 13">
+            <a:extLst>
+              <a:ext uri="{FF2B5EF4-FFF2-40B4-BE49-F238E27FC236}">
+                <a16:creationId xmlns:a16="http://schemas.microsoft.com/office/drawing/2014/main" id="{86997757-C40C-66AD-AB79-6B2BB9F33F74}"/>
+              </a:ext>
+            </a:extLst>
+          </p:cNvPr>
+          <p:cNvPicPr>
+            <a:picLocks noChangeAspect="1"/>
+          </p:cNvPicPr>
+          <p:nvPr/>
+        </p:nvPicPr>
+        <p:blipFill>
+          <a:blip r:embed="rId3"/>
+          <a:stretch>
+            <a:fillRect/>
+          </a:stretch>
+        </p:blipFill>
+        <p:spPr>
+          <a:xfrm>
+            <a:off x="499361" y="382510"/>
+            <a:ext cx="4439270" cy="2829320"/>
+          </a:xfrm>
+          <a:prstGeom prst="rect">
+            <a:avLst/>
+          </a:prstGeom>
+        </p:spPr>
+      </p:pic>
+      <p:sp>
+        <p:nvSpPr>
+          <p:cNvPr id="15" name="화살표: 아래로 구부러짐 14">
+            <a:extLst>
+              <a:ext uri="{FF2B5EF4-FFF2-40B4-BE49-F238E27FC236}">
+                <a16:creationId xmlns:a16="http://schemas.microsoft.com/office/drawing/2014/main" id="{F556C10E-F49E-6679-64F0-FEE910A64004}"/>
+              </a:ext>
+            </a:extLst>
+          </p:cNvPr>
+          <p:cNvSpPr/>
+          <p:nvPr/>
+        </p:nvSpPr>
+        <p:spPr>
+          <a:xfrm rot="4014452">
+            <a:off x="5486400" y="1931670"/>
+            <a:ext cx="1680210" cy="1200150"/>
+          </a:xfrm>
+          <a:prstGeom prst="curvedDownArrow">
+            <a:avLst/>
+          </a:prstGeom>
+        </p:spPr>
+        <p:style>
+          <a:lnRef idx="2">
+            <a:schemeClr val="accent1">
+              <a:shade val="15000"/>
+            </a:schemeClr>
+          </a:lnRef>
+          <a:fillRef idx="1">
+            <a:schemeClr val="accent1"/>
+          </a:fillRef>
+          <a:effectRef idx="0">
+            <a:schemeClr val="accent1"/>
+          </a:effectRef>
+          <a:fontRef idx="minor">
+            <a:schemeClr val="lt1"/>
+          </a:fontRef>
+        </p:style>
+        <p:txBody>
+          <a:bodyPr rtlCol="0" anchor="ctr"/>
+          <a:lstStyle/>
+          <a:p>
+            <a:pPr algn="ctr"/>
+            <a:endParaRPr lang="ko-KR" altLang="en-US">
+              <a:solidFill>
+                <a:schemeClr val="tx1"/>
+              </a:solidFill>
+            </a:endParaRPr>
+          </a:p>
+        </p:txBody>
+      </p:sp>
+      <p:sp>
+        <p:nvSpPr>
+          <p:cNvPr id="16" name="사각형: 모서리가 접힌 도형 15">
+            <a:extLst>
+              <a:ext uri="{FF2B5EF4-FFF2-40B4-BE49-F238E27FC236}">
+                <a16:creationId xmlns:a16="http://schemas.microsoft.com/office/drawing/2014/main" id="{6ED55A98-B26E-7863-22A0-0285D36635C9}"/>
+              </a:ext>
+            </a:extLst>
+          </p:cNvPr>
+          <p:cNvSpPr/>
+          <p:nvPr/>
+        </p:nvSpPr>
+        <p:spPr>
+          <a:xfrm>
+            <a:off x="7093701" y="1669946"/>
+            <a:ext cx="4499007" cy="1759054"/>
+          </a:xfrm>
+          <a:prstGeom prst="foldedCorner">
+            <a:avLst>
+              <a:gd name="adj" fmla="val 3878"/>
+            </a:avLst>
+          </a:prstGeom>
+          <a:solidFill>
+            <a:schemeClr val="bg1">
+              <a:lumMod val="95000"/>
+            </a:schemeClr>
+          </a:solidFill>
+          <a:ln w="3175">
+            <a:solidFill>
+              <a:schemeClr val="tx1">
+                <a:lumMod val="50000"/>
+                <a:lumOff val="50000"/>
+              </a:schemeClr>
+            </a:solidFill>
+          </a:ln>
+        </p:spPr>
+        <p:style>
+          <a:lnRef idx="2">
+            <a:schemeClr val="accent1">
+              <a:shade val="15000"/>
+            </a:schemeClr>
+          </a:lnRef>
+          <a:fillRef idx="1">
+            <a:schemeClr val="accent1"/>
+          </a:fillRef>
+          <a:effectRef idx="0">
+            <a:schemeClr val="accent1"/>
+          </a:effectRef>
+          <a:fontRef idx="minor">
+            <a:schemeClr val="lt1"/>
+          </a:fontRef>
+        </p:style>
+        <p:txBody>
+          <a:bodyPr rtlCol="0" anchor="t" anchorCtr="0"/>
+          <a:lstStyle/>
+          <a:p>
+            <a:pPr marL="171450" indent="-171450">
+              <a:buFontTx/>
+              <a:buChar char="-"/>
+            </a:pPr>
+            <a:r>
+              <a:rPr lang="ko-KR" altLang="en-US" sz="1200">
+                <a:solidFill>
+                  <a:schemeClr val="tx1">
+                    <a:lumMod val="75000"/>
+                    <a:lumOff val="25000"/>
+                  </a:schemeClr>
+                </a:solidFill>
+              </a:rPr>
+              <a:t>수정사항</a:t>
+            </a:r>
+            <a:endParaRPr lang="en-US" altLang="ko-KR" sz="1200">
+              <a:solidFill>
+                <a:schemeClr val="tx1">
+                  <a:lumMod val="75000"/>
+                  <a:lumOff val="25000"/>
+                </a:schemeClr>
+              </a:solidFill>
+            </a:endParaRPr>
+          </a:p>
+          <a:p>
+            <a:r>
+              <a:rPr lang="en-US" altLang="ko-KR" sz="1200" b="0">
+                <a:solidFill>
+                  <a:schemeClr val="tx1">
+                    <a:lumMod val="75000"/>
+                    <a:lumOff val="25000"/>
+                  </a:schemeClr>
+                </a:solidFill>
+                <a:effectLst/>
+                <a:latin typeface="Consolas" panose="020B0609020204030204" pitchFamily="49" charset="0"/>
+              </a:rPr>
+              <a:t>State </a:t>
+            </a:r>
+            <a:r>
+              <a:rPr lang="ko-KR" altLang="en-US" sz="1200" b="0">
+                <a:solidFill>
+                  <a:schemeClr val="tx1">
+                    <a:lumMod val="75000"/>
+                    <a:lumOff val="25000"/>
+                  </a:schemeClr>
+                </a:solidFill>
+                <a:effectLst/>
+                <a:latin typeface="Consolas" panose="020B0609020204030204" pitchFamily="49" charset="0"/>
+              </a:rPr>
+              <a:t>트리 모양을 </a:t>
+            </a:r>
+            <a:r>
+              <a:rPr lang="en-US" altLang="ko-KR" sz="1200" b="0">
+                <a:solidFill>
+                  <a:schemeClr val="tx1">
+                    <a:lumMod val="75000"/>
+                    <a:lumOff val="25000"/>
+                  </a:schemeClr>
+                </a:solidFill>
+                <a:effectLst/>
+                <a:latin typeface="Consolas" panose="020B0609020204030204" pitchFamily="49" charset="0"/>
+              </a:rPr>
+              <a:t>Page Tree</a:t>
+            </a:r>
+            <a:r>
+              <a:rPr lang="ko-KR" altLang="en-US" sz="1200" b="0">
+                <a:solidFill>
+                  <a:schemeClr val="tx1">
+                    <a:lumMod val="75000"/>
+                    <a:lumOff val="25000"/>
+                  </a:schemeClr>
+                </a:solidFill>
+                <a:effectLst/>
+                <a:latin typeface="Consolas" panose="020B0609020204030204" pitchFamily="49" charset="0"/>
+              </a:rPr>
+              <a:t>모양하고 동일하게 적용해주고</a:t>
+            </a:r>
+            <a:endParaRPr lang="en-US" altLang="ko-KR" sz="1200" b="0">
+              <a:solidFill>
+                <a:schemeClr val="tx1">
+                  <a:lumMod val="75000"/>
+                  <a:lumOff val="25000"/>
+                </a:schemeClr>
+              </a:solidFill>
+              <a:effectLst/>
+              <a:latin typeface="Consolas" panose="020B0609020204030204" pitchFamily="49" charset="0"/>
+            </a:endParaRPr>
+          </a:p>
+          <a:p>
+            <a:endParaRPr lang="en-US" altLang="ko-KR" sz="1200">
+              <a:solidFill>
+                <a:schemeClr val="tx1">
+                  <a:lumMod val="75000"/>
+                  <a:lumOff val="25000"/>
+                </a:schemeClr>
+              </a:solidFill>
+              <a:latin typeface="Consolas" panose="020B0609020204030204" pitchFamily="49" charset="0"/>
+            </a:endParaRPr>
+          </a:p>
+          <a:p>
+            <a:r>
+              <a:rPr lang="en-US" altLang="ko-KR" sz="1200" b="0">
+                <a:solidFill>
+                  <a:schemeClr val="tx1">
+                    <a:lumMod val="75000"/>
+                    <a:lumOff val="25000"/>
+                  </a:schemeClr>
+                </a:solidFill>
+                <a:effectLst/>
+                <a:latin typeface="Consolas" panose="020B0609020204030204" pitchFamily="49" charset="0"/>
+              </a:rPr>
+              <a:t>State </a:t>
+            </a:r>
+            <a:r>
+              <a:rPr lang="ko-KR" altLang="en-US" sz="1200" b="0">
+                <a:solidFill>
+                  <a:schemeClr val="tx1">
+                    <a:lumMod val="75000"/>
+                    <a:lumOff val="25000"/>
+                  </a:schemeClr>
+                </a:solidFill>
+                <a:effectLst/>
+                <a:latin typeface="Consolas" panose="020B0609020204030204" pitchFamily="49" charset="0"/>
+              </a:rPr>
+              <a:t>트리에서 최상위 </a:t>
+            </a:r>
+            <a:r>
+              <a:rPr lang="en-US" altLang="ko-KR" sz="1200" b="0">
+                <a:solidFill>
+                  <a:schemeClr val="tx1">
+                    <a:lumMod val="75000"/>
+                    <a:lumOff val="25000"/>
+                  </a:schemeClr>
+                </a:solidFill>
+                <a:effectLst/>
+                <a:latin typeface="Consolas" panose="020B0609020204030204" pitchFamily="49" charset="0"/>
+              </a:rPr>
+              <a:t>State</a:t>
+            </a:r>
+            <a:r>
+              <a:rPr lang="ko-KR" altLang="en-US" sz="1200" b="0">
+                <a:solidFill>
+                  <a:schemeClr val="tx1">
+                    <a:lumMod val="75000"/>
+                    <a:lumOff val="25000"/>
+                  </a:schemeClr>
+                </a:solidFill>
+                <a:effectLst/>
+                <a:latin typeface="Consolas" panose="020B0609020204030204" pitchFamily="49" charset="0"/>
+              </a:rPr>
+              <a:t>노드를 클릭했을때 자식 목록이 편집 테이블에 표시 되어야 함</a:t>
+            </a:r>
+            <a:endParaRPr lang="en-US" altLang="ko-KR" sz="1200" b="0">
+              <a:solidFill>
+                <a:schemeClr val="tx1">
+                  <a:lumMod val="75000"/>
+                  <a:lumOff val="25000"/>
+                </a:schemeClr>
+              </a:solidFill>
+              <a:effectLst/>
+              <a:latin typeface="Consolas" panose="020B0609020204030204" pitchFamily="49" charset="0"/>
+            </a:endParaRPr>
+          </a:p>
+          <a:p>
+            <a:pPr marL="228600" indent="-228600">
+              <a:buAutoNum type="arabicPeriod"/>
+            </a:pPr>
+            <a:endParaRPr lang="en-US" altLang="ko-KR" sz="1200">
+              <a:solidFill>
+                <a:schemeClr val="tx1">
+                  <a:lumMod val="75000"/>
+                  <a:lumOff val="25000"/>
+                </a:schemeClr>
+              </a:solidFill>
+              <a:latin typeface="Consolas" panose="020B0609020204030204" pitchFamily="49" charset="0"/>
+            </a:endParaRPr>
+          </a:p>
+          <a:p>
+            <a:pPr marL="228600" indent="-228600">
+              <a:buAutoNum type="arabicPeriod"/>
+            </a:pPr>
+            <a:endParaRPr lang="en-US" altLang="ko-KR" sz="1200" b="0">
+              <a:solidFill>
+                <a:srgbClr val="BBBEBF"/>
+              </a:solidFill>
+              <a:effectLst/>
+              <a:latin typeface="Consolas" panose="020B0609020204030204" pitchFamily="49" charset="0"/>
+            </a:endParaRPr>
+          </a:p>
+          <a:p>
+            <a:endParaRPr lang="ko-KR" altLang="en-US" sz="1200">
+              <a:solidFill>
+                <a:schemeClr val="tx1">
+                  <a:lumMod val="75000"/>
+                  <a:lumOff val="25000"/>
+                </a:schemeClr>
+              </a:solidFill>
+            </a:endParaRPr>
+          </a:p>
+        </p:txBody>
+      </p:sp>
+    </p:spTree>
+    <p:extLst>
+      <p:ext uri="{BB962C8B-B14F-4D97-AF65-F5344CB8AC3E}">
+        <p14:creationId xmlns:p14="http://schemas.microsoft.com/office/powerpoint/2010/main" val="581573676"/>
+      </p:ext>
+    </p:extLst>
+  </p:cSld>
+  <p:clrMapOvr>
+    <a:masterClrMapping/>
+  </p:clrMapOvr>
+</p:sld>
+</file>
+
+<file path=ppt/slides/slide8.xml><?xml version="1.0" encoding="utf-8"?>
+<p:sld xmlns:a="http://schemas.openxmlformats.org/drawingml/2006/main" xmlns:r="http://schemas.openxmlformats.org/officeDocument/2006/relationships" xmlns:p="http://schemas.openxmlformats.org/presentationml/2006/main">
+  <p:cSld>
+    <p:spTree>
+      <p:nvGrpSpPr>
+        <p:cNvPr id="1" name=""/>
+        <p:cNvGrpSpPr/>
+        <p:nvPr/>
+      </p:nvGrpSpPr>
+      <p:grpSpPr>
+        <a:xfrm>
+          <a:off x="0" y="0"/>
+          <a:ext cx="0" cy="0"/>
+          <a:chOff x="0" y="0"/>
+          <a:chExt cx="0" cy="0"/>
+        </a:xfrm>
+      </p:grpSpPr>
+      <p:pic>
+        <p:nvPicPr>
+          <p:cNvPr id="3" name="그림 2">
+            <a:extLst>
+              <a:ext uri="{FF2B5EF4-FFF2-40B4-BE49-F238E27FC236}">
+                <a16:creationId xmlns:a16="http://schemas.microsoft.com/office/drawing/2014/main" id="{EEEE63DB-3065-BDA1-A3DD-EE8BF19FBEF0}"/>
+              </a:ext>
+            </a:extLst>
+          </p:cNvPr>
+          <p:cNvPicPr>
+            <a:picLocks noChangeAspect="1"/>
+          </p:cNvPicPr>
+          <p:nvPr/>
+        </p:nvPicPr>
+        <p:blipFill>
+          <a:blip r:embed="rId2"/>
+          <a:stretch>
+            <a:fillRect/>
+          </a:stretch>
+        </p:blipFill>
+        <p:spPr>
+          <a:xfrm>
+            <a:off x="175909" y="297180"/>
+            <a:ext cx="7135649" cy="4149090"/>
+          </a:xfrm>
+          <a:prstGeom prst="rect">
+            <a:avLst/>
+          </a:prstGeom>
+        </p:spPr>
+      </p:pic>
+      <p:pic>
+        <p:nvPicPr>
+          <p:cNvPr id="7" name="그림 6">
+            <a:extLst>
+              <a:ext uri="{FF2B5EF4-FFF2-40B4-BE49-F238E27FC236}">
+                <a16:creationId xmlns:a16="http://schemas.microsoft.com/office/drawing/2014/main" id="{50A40CE1-90FB-A954-6688-F7EE6EA6B452}"/>
+              </a:ext>
+            </a:extLst>
+          </p:cNvPr>
+          <p:cNvPicPr>
+            <a:picLocks noChangeAspect="1"/>
+          </p:cNvPicPr>
+          <p:nvPr/>
+        </p:nvPicPr>
+        <p:blipFill>
+          <a:blip r:embed="rId3"/>
+          <a:stretch>
+            <a:fillRect/>
+          </a:stretch>
+        </p:blipFill>
+        <p:spPr>
+          <a:xfrm>
+            <a:off x="7311558" y="297180"/>
+            <a:ext cx="2655402" cy="3352445"/>
+          </a:xfrm>
+          <a:prstGeom prst="rect">
+            <a:avLst/>
+          </a:prstGeom>
+        </p:spPr>
+      </p:pic>
+      <p:sp>
+        <p:nvSpPr>
+          <p:cNvPr id="8" name="사각형: 모서리가 접힌 도형 7">
+            <a:extLst>
+              <a:ext uri="{FF2B5EF4-FFF2-40B4-BE49-F238E27FC236}">
+                <a16:creationId xmlns:a16="http://schemas.microsoft.com/office/drawing/2014/main" id="{29B17203-4159-8B7F-3F1F-344C5F62BC27}"/>
+              </a:ext>
+            </a:extLst>
+          </p:cNvPr>
+          <p:cNvSpPr/>
+          <p:nvPr/>
+        </p:nvSpPr>
+        <p:spPr>
+          <a:xfrm>
+            <a:off x="4942257" y="475862"/>
+            <a:ext cx="4304380" cy="3303036"/>
+          </a:xfrm>
+          <a:prstGeom prst="foldedCorner">
+            <a:avLst>
+              <a:gd name="adj" fmla="val 7579"/>
+            </a:avLst>
+          </a:prstGeom>
+          <a:solidFill>
+            <a:schemeClr val="bg1">
+              <a:lumMod val="95000"/>
+            </a:schemeClr>
+          </a:solidFill>
+          <a:ln w="3175">
+            <a:solidFill>
+              <a:schemeClr val="tx1">
+                <a:lumMod val="50000"/>
+                <a:lumOff val="50000"/>
+              </a:schemeClr>
+            </a:solidFill>
+          </a:ln>
+        </p:spPr>
+        <p:style>
+          <a:lnRef idx="2">
+            <a:schemeClr val="accent1">
+              <a:shade val="15000"/>
+            </a:schemeClr>
+          </a:lnRef>
+          <a:fillRef idx="1">
+            <a:schemeClr val="accent1"/>
+          </a:fillRef>
+          <a:effectRef idx="0">
+            <a:schemeClr val="accent1"/>
+          </a:effectRef>
+          <a:fontRef idx="minor">
+            <a:schemeClr val="lt1"/>
+          </a:fontRef>
+        </p:style>
+        <p:txBody>
+          <a:bodyPr rtlCol="0" anchor="ctr"/>
+          <a:lstStyle/>
+          <a:p>
+            <a:pPr marL="171450" indent="-171450">
+              <a:buFontTx/>
+              <a:buChar char="-"/>
+            </a:pPr>
+            <a:r>
+              <a:rPr lang="ko-KR" altLang="en-US" sz="1200">
+                <a:solidFill>
+                  <a:schemeClr val="tx1">
+                    <a:lumMod val="75000"/>
+                    <a:lumOff val="25000"/>
+                  </a:schemeClr>
+                </a:solidFill>
+              </a:rPr>
+              <a:t>수정사항</a:t>
+            </a:r>
+            <a:endParaRPr lang="en-US" altLang="ko-KR" sz="1200">
+              <a:solidFill>
+                <a:schemeClr val="tx1">
+                  <a:lumMod val="75000"/>
+                  <a:lumOff val="25000"/>
+                </a:schemeClr>
+              </a:solidFill>
+            </a:endParaRPr>
+          </a:p>
+          <a:p>
+            <a:r>
+              <a:rPr lang="en-US" altLang="ko-KR" sz="1200">
+                <a:solidFill>
+                  <a:schemeClr val="tx1">
+                    <a:lumMod val="75000"/>
+                    <a:lumOff val="25000"/>
+                  </a:schemeClr>
+                </a:solidFill>
+              </a:rPr>
+              <a:t>State </a:t>
+            </a:r>
+            <a:r>
+              <a:rPr lang="ko-KR" altLang="en-US" sz="1200">
+                <a:solidFill>
+                  <a:schemeClr val="tx1">
+                    <a:lumMod val="75000"/>
+                    <a:lumOff val="25000"/>
+                  </a:schemeClr>
+                </a:solidFill>
+              </a:rPr>
+              <a:t>창의 변수필드는 </a:t>
+            </a:r>
+            <a:r>
+              <a:rPr lang="en-US" altLang="ko-KR" sz="1200">
+                <a:solidFill>
+                  <a:schemeClr val="tx1">
+                    <a:lumMod val="75000"/>
+                    <a:lumOff val="25000"/>
+                  </a:schemeClr>
+                </a:solidFill>
+              </a:rPr>
+              <a:t>TREE</a:t>
+            </a:r>
+            <a:r>
+              <a:rPr lang="ko-KR" altLang="en-US" sz="1200">
+                <a:solidFill>
+                  <a:schemeClr val="tx1">
+                    <a:lumMod val="75000"/>
+                    <a:lumOff val="25000"/>
+                  </a:schemeClr>
+                </a:solidFill>
+              </a:rPr>
+              <a:t>모양으로 적용해줘</a:t>
+            </a:r>
+            <a:endParaRPr lang="en-US" altLang="ko-KR" sz="1200">
+              <a:solidFill>
+                <a:schemeClr val="tx1">
+                  <a:lumMod val="75000"/>
+                  <a:lumOff val="25000"/>
+                </a:schemeClr>
+              </a:solidFill>
+            </a:endParaRPr>
+          </a:p>
+          <a:p>
+            <a:endParaRPr lang="en-US" altLang="ko-KR" sz="1200">
+              <a:solidFill>
+                <a:schemeClr val="tx1">
+                  <a:lumMod val="75000"/>
+                  <a:lumOff val="25000"/>
+                </a:schemeClr>
+              </a:solidFill>
+            </a:endParaRPr>
+          </a:p>
+          <a:p>
+            <a:endParaRPr lang="en-US" altLang="ko-KR" sz="1200">
+              <a:solidFill>
+                <a:schemeClr val="tx1">
+                  <a:lumMod val="75000"/>
+                  <a:lumOff val="25000"/>
+                </a:schemeClr>
+              </a:solidFill>
+            </a:endParaRPr>
+          </a:p>
+          <a:p>
+            <a:endParaRPr lang="en-US" altLang="ko-KR" sz="1200">
+              <a:solidFill>
+                <a:schemeClr val="tx1"/>
+              </a:solidFill>
+            </a:endParaRPr>
+          </a:p>
+          <a:p>
+            <a:r>
+              <a:rPr lang="en-US" altLang="ko-KR" sz="1200" b="0">
+                <a:solidFill>
+                  <a:schemeClr val="tx1"/>
+                </a:solidFill>
+                <a:effectLst/>
+                <a:latin typeface="Consolas" panose="020B0609020204030204" pitchFamily="49" charset="0"/>
+              </a:rPr>
+              <a:t>  state: () =&gt; ({</a:t>
+            </a:r>
+          </a:p>
+          <a:p>
+            <a:r>
+              <a:rPr lang="en-US" altLang="ko-KR" sz="1200" b="0">
+                <a:solidFill>
+                  <a:schemeClr val="tx1"/>
+                </a:solidFill>
+                <a:effectLst/>
+                <a:latin typeface="Consolas" panose="020B0609020204030204" pitchFamily="49" charset="0"/>
+              </a:rPr>
+              <a:t>    rows: [],</a:t>
+            </a:r>
+          </a:p>
+          <a:p>
+            <a:r>
+              <a:rPr lang="en-US" altLang="ko-KR" sz="1200" b="0">
+                <a:solidFill>
+                  <a:schemeClr val="tx1"/>
+                </a:solidFill>
+                <a:effectLst/>
+                <a:latin typeface="Consolas" panose="020B0609020204030204" pitchFamily="49" charset="0"/>
+              </a:rPr>
+              <a:t>    selectedRow: null,</a:t>
+            </a:r>
+          </a:p>
+          <a:p>
+            <a:r>
+              <a:rPr lang="en-US" altLang="ko-KR" sz="1200" b="0">
+                <a:solidFill>
+                  <a:schemeClr val="tx1"/>
+                </a:solidFill>
+                <a:effectLst/>
+                <a:latin typeface="Consolas" panose="020B0609020204030204" pitchFamily="49" charset="0"/>
+              </a:rPr>
+              <a:t>    loading: false,</a:t>
+            </a:r>
+          </a:p>
+          <a:p>
+            <a:r>
+              <a:rPr lang="en-US" altLang="ko-KR" sz="1200" b="0">
+                <a:solidFill>
+                  <a:schemeClr val="tx1"/>
+                </a:solidFill>
+                <a:effectLst/>
+                <a:latin typeface="Consolas" panose="020B0609020204030204" pitchFamily="49" charset="0"/>
+              </a:rPr>
+              <a:t>    entity:{</a:t>
+            </a:r>
+          </a:p>
+          <a:p>
+            <a:r>
+              <a:rPr lang="en-US" altLang="ko-KR" sz="1200">
+                <a:solidFill>
+                  <a:schemeClr val="tx1"/>
+                </a:solidFill>
+                <a:latin typeface="Consolas" panose="020B0609020204030204" pitchFamily="49" charset="0"/>
+              </a:rPr>
+              <a:t>	   id: null,</a:t>
+            </a:r>
+          </a:p>
+          <a:p>
+            <a:r>
+              <a:rPr lang="en-US" altLang="ko-KR" sz="1200">
+                <a:solidFill>
+                  <a:schemeClr val="tx1"/>
+                </a:solidFill>
+                <a:latin typeface="Consolas" panose="020B0609020204030204" pitchFamily="49" charset="0"/>
+              </a:rPr>
+              <a:t>  	   name:null</a:t>
+            </a:r>
+          </a:p>
+          <a:p>
+            <a:r>
+              <a:rPr lang="en-US" altLang="ko-KR" sz="1200" b="0">
+                <a:solidFill>
+                  <a:schemeClr val="tx1"/>
+                </a:solidFill>
+                <a:effectLst/>
+                <a:latin typeface="Consolas" panose="020B0609020204030204" pitchFamily="49" charset="0"/>
+              </a:rPr>
+              <a:t>	} </a:t>
+            </a:r>
+          </a:p>
+          <a:p>
+            <a:r>
+              <a:rPr lang="en-US" altLang="ko-KR" sz="1200" b="0">
+                <a:solidFill>
+                  <a:schemeClr val="tx1"/>
+                </a:solidFill>
+                <a:effectLst/>
+                <a:latin typeface="Consolas" panose="020B0609020204030204" pitchFamily="49" charset="0"/>
+              </a:rPr>
+              <a:t>  }),</a:t>
+            </a:r>
+          </a:p>
+          <a:p>
+            <a:endParaRPr lang="en-US" altLang="ko-KR" sz="1200">
+              <a:solidFill>
+                <a:schemeClr val="tx1">
+                  <a:lumMod val="75000"/>
+                  <a:lumOff val="25000"/>
+                </a:schemeClr>
+              </a:solidFill>
+            </a:endParaRPr>
+          </a:p>
+          <a:p>
+            <a:endParaRPr lang="ko-KR" altLang="en-US" sz="1200">
+              <a:solidFill>
+                <a:schemeClr val="tx1">
+                  <a:lumMod val="75000"/>
+                  <a:lumOff val="25000"/>
+                </a:schemeClr>
+              </a:solidFill>
+            </a:endParaRPr>
+          </a:p>
+        </p:txBody>
+      </p:sp>
+    </p:spTree>
+    <p:extLst>
+      <p:ext uri="{BB962C8B-B14F-4D97-AF65-F5344CB8AC3E}">
+        <p14:creationId xmlns:p14="http://schemas.microsoft.com/office/powerpoint/2010/main" val="2238146254"/>
+      </p:ext>
+    </p:extLst>
+  </p:cSld>
+  <p:clrMapOvr>
+    <a:masterClrMapping/>
+  </p:clrMapOvr>
+</p:sld>
+</file>
+
 <file path=ppt/theme/theme1.xml><?xml version="1.0" encoding="utf-8"?>
 <a:theme xmlns:a="http://schemas.openxmlformats.org/drawingml/2006/main" name="Office 테마">
   <a:themeElements>
